--- a/docs/theme-preview/pptx/grid.pptx
+++ b/docs/theme-preview/pptx/grid.pptx
@@ -13977,7 +13977,7 @@
                 <a:ea typeface="Pretendard" pitchFamily="34" charset="-122"/>
                 <a:cs typeface="Pretendard" pitchFamily="34" charset="-120"/>
               </a:rPr>
-              <a:t>Markdown Semantics</a:t>
+              <a:t>Semantic Blocks</a:t>
             </a:r>
             <a:endParaRPr lang="en-US" sz="2200" dirty="0"/>
           </a:p>
@@ -18758,7 +18758,7 @@
                 <a:ea typeface="Pretendard" pitchFamily="34" charset="-122"/>
                 <a:cs typeface="Pretendard" pitchFamily="34" charset="-120"/>
               </a:rPr>
-              <a:t>Markdown Semantics</a:t>
+              <a:t>Semantic Blocks</a:t>
             </a:r>
             <a:endParaRPr lang="en-US" sz="3400" dirty="0"/>
           </a:p>

--- a/docs/theme-preview/pptx/grid.pptx
+++ b/docs/theme-preview/pptx/grid.pptx
@@ -125,7 +125,7 @@
 </p:presentation>
 </file>
 
-<file path=ppt/charts/chart10.xml><?xml version="1.0" encoding="utf-8"?>
+<file path=ppt/charts/chart8.xml><?xml version="1.0" encoding="utf-8"?>
 <c:chartSpace xmlns:c="http://schemas.openxmlformats.org/drawingml/2006/chart" xmlns:a="http://schemas.openxmlformats.org/drawingml/2006/main" xmlns:r="http://schemas.openxmlformats.org/officeDocument/2006/relationships">
   <c:date1904 val="0"/>
   <c:roundedCorners val="1"/>
@@ -12807,8 +12807,37 @@
         </p:nvSpPr>
         <p:spPr>
           <a:xfrm>
-            <a:off x="914400" y="1417320"/>
-            <a:ext cx="73152" cy="868680"/>
+            <a:off x="786384" y="1956816"/>
+            <a:ext cx="32004" cy="3483864"/>
+          </a:xfrm>
+          <a:prstGeom prst="rect">
+            <a:avLst/>
+          </a:prstGeom>
+          <a:solidFill>
+            <a:srgbClr val="111827">
+              <a:alpha val="80000"/>
+            </a:srgbClr>
+          </a:solidFill>
+          <a:ln w="12700">
+            <a:solidFill>
+              <a:srgbClr val="111827">
+                <a:alpha val="0"/>
+              </a:srgbClr>
+            </a:solidFill>
+            <a:prstDash val="solid"/>
+          </a:ln>
+        </p:spPr>
+      </p:sp>
+      <p:sp>
+        <p:nvSpPr>
+          <p:cNvPr id="17" name="Shape 15"/>
+          <p:cNvSpPr/>
+          <p:nvPr/>
+        </p:nvSpPr>
+        <p:spPr>
+          <a:xfrm>
+            <a:off x="914400" y="1865376"/>
+            <a:ext cx="73152" cy="1024128"/>
           </a:xfrm>
           <a:prstGeom prst="rect">
             <a:avLst/>
@@ -12828,14 +12857,14 @@
       </p:sp>
       <p:sp>
         <p:nvSpPr>
-          <p:cNvPr id="17" name="Shape 15"/>
-          <p:cNvSpPr/>
-          <p:nvPr/>
-        </p:nvSpPr>
-        <p:spPr>
-          <a:xfrm>
-            <a:off x="914400" y="2560320"/>
-            <a:ext cx="73152" cy="868680"/>
+          <p:cNvPr id="18" name="Shape 16"/>
+          <p:cNvSpPr/>
+          <p:nvPr/>
+        </p:nvSpPr>
+        <p:spPr>
+          <a:xfrm>
+            <a:off x="914400" y="3191256"/>
+            <a:ext cx="73152" cy="1024128"/>
           </a:xfrm>
           <a:prstGeom prst="rect">
             <a:avLst/>
@@ -12855,14 +12884,14 @@
       </p:sp>
       <p:sp>
         <p:nvSpPr>
-          <p:cNvPr id="18" name="Shape 16"/>
-          <p:cNvSpPr/>
-          <p:nvPr/>
-        </p:nvSpPr>
-        <p:spPr>
-          <a:xfrm>
-            <a:off x="914400" y="3703320"/>
-            <a:ext cx="73152" cy="868680"/>
+          <p:cNvPr id="19" name="Shape 17"/>
+          <p:cNvSpPr/>
+          <p:nvPr/>
+        </p:nvSpPr>
+        <p:spPr>
+          <a:xfrm>
+            <a:off x="914400" y="4507992"/>
+            <a:ext cx="73152" cy="1024128"/>
           </a:xfrm>
           <a:prstGeom prst="rect">
             <a:avLst/>
@@ -12882,7 +12911,7 @@
       </p:sp>
       <p:pic>
         <p:nvPicPr>
-          <p:cNvPr id="19" name="Image 0" descr="preencoded.png">    </p:cNvPr>
+          <p:cNvPr id="20" name="Image 0" descr="preencoded.png">    </p:cNvPr>
           <p:cNvPicPr>
             <a:picLocks noChangeAspect="1"/>
           </p:cNvPicPr>
@@ -12902,8 +12931,8 @@
         </p:blipFill>
         <p:spPr>
           <a:xfrm>
-            <a:off x="914400" y="1417320"/>
-            <a:ext cx="10241280" cy="868680"/>
+            <a:off x="914400" y="1865376"/>
+            <a:ext cx="10241280" cy="1024128"/>
           </a:xfrm>
           <a:prstGeom prst="rect">
             <a:avLst/>
@@ -12912,7 +12941,7 @@
       </p:pic>
       <p:pic>
         <p:nvPicPr>
-          <p:cNvPr id="20" name="Image 1" descr="preencoded.png">    </p:cNvPr>
+          <p:cNvPr id="21" name="Image 1" descr="preencoded.png">    </p:cNvPr>
           <p:cNvPicPr>
             <a:picLocks noChangeAspect="1"/>
           </p:cNvPicPr>
@@ -12932,8 +12961,8 @@
         </p:blipFill>
         <p:spPr>
           <a:xfrm>
-            <a:off x="914400" y="2560320"/>
-            <a:ext cx="10241280" cy="868680"/>
+            <a:off x="914400" y="3191256"/>
+            <a:ext cx="10241280" cy="1024128"/>
           </a:xfrm>
           <a:prstGeom prst="rect">
             <a:avLst/>
@@ -12942,7 +12971,7 @@
       </p:pic>
       <p:pic>
         <p:nvPicPr>
-          <p:cNvPr id="21" name="Image 2" descr="preencoded.png">    </p:cNvPr>
+          <p:cNvPr id="22" name="Image 2" descr="preencoded.png">    </p:cNvPr>
           <p:cNvPicPr>
             <a:picLocks noChangeAspect="1"/>
           </p:cNvPicPr>
@@ -12962,8 +12991,8 @@
         </p:blipFill>
         <p:spPr>
           <a:xfrm>
-            <a:off x="914400" y="3703320"/>
-            <a:ext cx="10241280" cy="868680"/>
+            <a:off x="914400" y="4507992"/>
+            <a:ext cx="10241280" cy="1024128"/>
           </a:xfrm>
           <a:prstGeom prst="rect">
             <a:avLst/>
@@ -12972,7 +13001,7 @@
       </p:pic>
       <p:sp>
         <p:nvSpPr>
-          <p:cNvPr id="22" name="Text 17"/>
+          <p:cNvPr id="23" name="Text 18"/>
           <p:cNvSpPr txBox="1"/>
           <p:nvPr/>
         </p:nvSpPr>
@@ -13014,18 +13043,18 @@
       </p:sp>
       <p:sp>
         <p:nvSpPr>
-          <p:cNvPr id="23" name="Shape 18"/>
-          <p:cNvSpPr/>
-          <p:nvPr/>
-        </p:nvSpPr>
-        <p:spPr>
-          <a:xfrm>
-            <a:off x="1097280" y="1623060"/>
-            <a:ext cx="457200" cy="457200"/>
+          <p:cNvPr id="24" name="Shape 19"/>
+          <p:cNvSpPr/>
+          <p:nvPr/>
+        </p:nvSpPr>
+        <p:spPr>
+          <a:xfrm>
+            <a:off x="1097280" y="2140428"/>
+            <a:ext cx="474025" cy="474025"/>
           </a:xfrm>
           <a:prstGeom prst="roundRect">
             <a:avLst>
-              <a:gd name="adj" fmla="val 8000"/>
+              <a:gd name="adj" fmla="val 7716"/>
             </a:avLst>
           </a:prstGeom>
           <a:solidFill>
@@ -13041,7 +13070,7 @@
       </p:sp>
       <p:pic>
         <p:nvPicPr>
-          <p:cNvPr id="24" name="Image 3" descr="flow icon from tabler-icons (MIT)">    </p:cNvPr>
+          <p:cNvPr id="25" name="Image 3" descr="flow icon from tabler-icons (MIT)">    </p:cNvPr>
           <p:cNvPicPr>
             <a:picLocks noChangeAspect="1"/>
           </p:cNvPicPr>
@@ -13061,8 +13090,8 @@
         </p:blipFill>
         <p:spPr>
           <a:xfrm>
-            <a:off x="1170432" y="1696212"/>
-            <a:ext cx="310896" cy="310896"/>
+            <a:off x="1170432" y="2213580"/>
+            <a:ext cx="327721" cy="327721"/>
           </a:xfrm>
           <a:prstGeom prst="rect">
             <a:avLst/>
@@ -13071,14 +13100,14 @@
       </p:pic>
       <p:sp>
         <p:nvSpPr>
-          <p:cNvPr id="25" name="Text 19"/>
+          <p:cNvPr id="26" name="Text 20"/>
           <p:cNvSpPr txBox="1"/>
           <p:nvPr/>
         </p:nvSpPr>
         <p:spPr>
           <a:xfrm>
-            <a:off x="1682496" y="1508760"/>
-            <a:ext cx="9272016" cy="685800"/>
+            <a:off x="1699321" y="1957548"/>
+            <a:ext cx="9255191" cy="839785"/>
           </a:xfrm>
           <a:prstGeom prst="rect">
             <a:avLst/>
@@ -13130,18 +13159,18 @@
       </p:sp>
       <p:sp>
         <p:nvSpPr>
-          <p:cNvPr id="26" name="Shape 20"/>
-          <p:cNvSpPr/>
-          <p:nvPr/>
-        </p:nvSpPr>
-        <p:spPr>
-          <a:xfrm>
-            <a:off x="1097280" y="2766060"/>
-            <a:ext cx="457200" cy="457200"/>
+          <p:cNvPr id="27" name="Shape 21"/>
+          <p:cNvSpPr/>
+          <p:nvPr/>
+        </p:nvSpPr>
+        <p:spPr>
+          <a:xfrm>
+            <a:off x="1097280" y="3466308"/>
+            <a:ext cx="474025" cy="474025"/>
           </a:xfrm>
           <a:prstGeom prst="roundRect">
             <a:avLst>
-              <a:gd name="adj" fmla="val 8000"/>
+              <a:gd name="adj" fmla="val 7716"/>
             </a:avLst>
           </a:prstGeom>
           <a:solidFill>
@@ -13157,7 +13186,7 @@
       </p:sp>
       <p:pic>
         <p:nvPicPr>
-          <p:cNvPr id="27" name="Image 4" descr="verified icon from tabler-icons (MIT)">    </p:cNvPr>
+          <p:cNvPr id="28" name="Image 4" descr="verified icon from tabler-icons (MIT)">    </p:cNvPr>
           <p:cNvPicPr>
             <a:picLocks noChangeAspect="1"/>
           </p:cNvPicPr>
@@ -13177,8 +13206,8 @@
         </p:blipFill>
         <p:spPr>
           <a:xfrm>
-            <a:off x="1170432" y="2839212"/>
-            <a:ext cx="310896" cy="310896"/>
+            <a:off x="1170432" y="3539460"/>
+            <a:ext cx="327721" cy="327721"/>
           </a:xfrm>
           <a:prstGeom prst="rect">
             <a:avLst/>
@@ -13187,14 +13216,14 @@
       </p:pic>
       <p:sp>
         <p:nvSpPr>
-          <p:cNvPr id="28" name="Text 21"/>
+          <p:cNvPr id="29" name="Text 22"/>
           <p:cNvSpPr txBox="1"/>
           <p:nvPr/>
         </p:nvSpPr>
         <p:spPr>
           <a:xfrm>
-            <a:off x="1682496" y="2651760"/>
-            <a:ext cx="9272016" cy="685800"/>
+            <a:off x="1699321" y="3283428"/>
+            <a:ext cx="9255191" cy="839785"/>
           </a:xfrm>
           <a:prstGeom prst="rect">
             <a:avLst/>
@@ -13246,18 +13275,18 @@
       </p:sp>
       <p:sp>
         <p:nvSpPr>
-          <p:cNvPr id="29" name="Shape 22"/>
-          <p:cNvSpPr/>
-          <p:nvPr/>
-        </p:nvSpPr>
-        <p:spPr>
-          <a:xfrm>
-            <a:off x="1097280" y="3909060"/>
-            <a:ext cx="457200" cy="457200"/>
+          <p:cNvPr id="30" name="Shape 23"/>
+          <p:cNvSpPr/>
+          <p:nvPr/>
+        </p:nvSpPr>
+        <p:spPr>
+          <a:xfrm>
+            <a:off x="1097280" y="4783044"/>
+            <a:ext cx="474025" cy="474025"/>
           </a:xfrm>
           <a:prstGeom prst="roundRect">
             <a:avLst>
-              <a:gd name="adj" fmla="val 8000"/>
+              <a:gd name="adj" fmla="val 7716"/>
             </a:avLst>
           </a:prstGeom>
           <a:solidFill>
@@ -13273,7 +13302,7 @@
       </p:sp>
       <p:pic>
         <p:nvPicPr>
-          <p:cNvPr id="30" name="Image 5" descr="spark icon from tabler-icons (MIT)">    </p:cNvPr>
+          <p:cNvPr id="31" name="Image 5" descr="spark icon from tabler-icons (MIT)">    </p:cNvPr>
           <p:cNvPicPr>
             <a:picLocks noChangeAspect="1"/>
           </p:cNvPicPr>
@@ -13293,8 +13322,8 @@
         </p:blipFill>
         <p:spPr>
           <a:xfrm>
-            <a:off x="1170432" y="3982212"/>
-            <a:ext cx="310896" cy="310896"/>
+            <a:off x="1170432" y="4856196"/>
+            <a:ext cx="327721" cy="327721"/>
           </a:xfrm>
           <a:prstGeom prst="rect">
             <a:avLst/>
@@ -13303,14 +13332,14 @@
       </p:pic>
       <p:sp>
         <p:nvSpPr>
-          <p:cNvPr id="31" name="Text 23"/>
+          <p:cNvPr id="32" name="Text 24"/>
           <p:cNvSpPr txBox="1"/>
           <p:nvPr/>
         </p:nvSpPr>
         <p:spPr>
           <a:xfrm>
-            <a:off x="1682496" y="3794760"/>
-            <a:ext cx="9272016" cy="685800"/>
+            <a:off x="1699321" y="4600164"/>
+            <a:ext cx="9255191" cy="839785"/>
           </a:xfrm>
           <a:prstGeom prst="rect">
             <a:avLst/>
@@ -13754,8 +13783,8 @@
         </p:nvSpPr>
         <p:spPr>
           <a:xfrm>
-            <a:off x="914400" y="1463040"/>
-            <a:ext cx="10241280" cy="73152"/>
+            <a:off x="822960" y="1188720"/>
+            <a:ext cx="10515600" cy="45720"/>
           </a:xfrm>
           <a:prstGeom prst="rect">
             <a:avLst/>
@@ -13775,7 +13804,387 @@
       </p:sp>
       <p:sp>
         <p:nvSpPr>
-          <p:cNvPr id="17" name="Text 15"/>
+          <p:cNvPr id="17" name="Shape 15"/>
+          <p:cNvSpPr/>
+          <p:nvPr/>
+        </p:nvSpPr>
+        <p:spPr>
+          <a:xfrm>
+            <a:off x="822960" y="6199632"/>
+            <a:ext cx="2011680" cy="45720"/>
+          </a:xfrm>
+          <a:prstGeom prst="rect">
+            <a:avLst/>
+          </a:prstGeom>
+          <a:solidFill>
+            <a:srgbClr val="111827"/>
+          </a:solidFill>
+          <a:ln w="12700">
+            <a:solidFill>
+              <a:srgbClr val="111827">
+                <a:alpha val="0"/>
+              </a:srgbClr>
+            </a:solidFill>
+            <a:prstDash val="solid"/>
+          </a:ln>
+        </p:spPr>
+      </p:sp>
+      <p:sp>
+        <p:nvSpPr>
+          <p:cNvPr id="18" name="Shape 16"/>
+          <p:cNvSpPr/>
+          <p:nvPr/>
+        </p:nvSpPr>
+        <p:spPr>
+          <a:xfrm>
+            <a:off x="6080760" y="1389888"/>
+            <a:ext cx="22860" cy="4663440"/>
+          </a:xfrm>
+          <a:prstGeom prst="rect">
+            <a:avLst/>
+          </a:prstGeom>
+          <a:solidFill>
+            <a:srgbClr val="CBD5E1">
+              <a:alpha val="90000"/>
+            </a:srgbClr>
+          </a:solidFill>
+          <a:ln w="12700">
+            <a:solidFill>
+              <a:srgbClr val="CBD5E1">
+                <a:alpha val="0"/>
+              </a:srgbClr>
+            </a:solidFill>
+            <a:prstDash val="solid"/>
+          </a:ln>
+        </p:spPr>
+      </p:sp>
+      <p:sp>
+        <p:nvSpPr>
+          <p:cNvPr id="19" name="Shape 17"/>
+          <p:cNvSpPr/>
+          <p:nvPr/>
+        </p:nvSpPr>
+        <p:spPr>
+          <a:xfrm>
+            <a:off x="822960" y="1389888"/>
+            <a:ext cx="73152" cy="658368"/>
+          </a:xfrm>
+          <a:prstGeom prst="rect">
+            <a:avLst/>
+          </a:prstGeom>
+          <a:solidFill>
+            <a:srgbClr val="DC2626"/>
+          </a:solidFill>
+          <a:ln w="12700">
+            <a:solidFill>
+              <a:srgbClr val="DC2626">
+                <a:alpha val="0"/>
+              </a:srgbClr>
+            </a:solidFill>
+            <a:prstDash val="solid"/>
+          </a:ln>
+        </p:spPr>
+      </p:sp>
+      <p:sp>
+        <p:nvSpPr>
+          <p:cNvPr id="20" name="Shape 18"/>
+          <p:cNvSpPr/>
+          <p:nvPr/>
+        </p:nvSpPr>
+        <p:spPr>
+          <a:xfrm>
+            <a:off x="822960" y="2194560"/>
+            <a:ext cx="73152" cy="658368"/>
+          </a:xfrm>
+          <a:prstGeom prst="rect">
+            <a:avLst/>
+          </a:prstGeom>
+          <a:solidFill>
+            <a:srgbClr val="111827"/>
+          </a:solidFill>
+          <a:ln w="12700">
+            <a:solidFill>
+              <a:srgbClr val="111827">
+                <a:alpha val="0"/>
+              </a:srgbClr>
+            </a:solidFill>
+            <a:prstDash val="solid"/>
+          </a:ln>
+        </p:spPr>
+      </p:sp>
+      <p:sp>
+        <p:nvSpPr>
+          <p:cNvPr id="21" name="Shape 19"/>
+          <p:cNvSpPr/>
+          <p:nvPr/>
+        </p:nvSpPr>
+        <p:spPr>
+          <a:xfrm>
+            <a:off x="822960" y="2990088"/>
+            <a:ext cx="73152" cy="658368"/>
+          </a:xfrm>
+          <a:prstGeom prst="rect">
+            <a:avLst/>
+          </a:prstGeom>
+          <a:solidFill>
+            <a:srgbClr val="DC2626"/>
+          </a:solidFill>
+          <a:ln w="12700">
+            <a:solidFill>
+              <a:srgbClr val="DC2626">
+                <a:alpha val="0"/>
+              </a:srgbClr>
+            </a:solidFill>
+            <a:prstDash val="solid"/>
+          </a:ln>
+        </p:spPr>
+      </p:sp>
+      <p:sp>
+        <p:nvSpPr>
+          <p:cNvPr id="22" name="Shape 20"/>
+          <p:cNvSpPr/>
+          <p:nvPr/>
+        </p:nvSpPr>
+        <p:spPr>
+          <a:xfrm>
+            <a:off x="822960" y="3794760"/>
+            <a:ext cx="73152" cy="658368"/>
+          </a:xfrm>
+          <a:prstGeom prst="rect">
+            <a:avLst/>
+          </a:prstGeom>
+          <a:solidFill>
+            <a:srgbClr val="111827"/>
+          </a:solidFill>
+          <a:ln w="12700">
+            <a:solidFill>
+              <a:srgbClr val="111827">
+                <a:alpha val="0"/>
+              </a:srgbClr>
+            </a:solidFill>
+            <a:prstDash val="solid"/>
+          </a:ln>
+        </p:spPr>
+      </p:sp>
+      <p:sp>
+        <p:nvSpPr>
+          <p:cNvPr id="23" name="Shape 21"/>
+          <p:cNvSpPr/>
+          <p:nvPr/>
+        </p:nvSpPr>
+        <p:spPr>
+          <a:xfrm>
+            <a:off x="822960" y="4599432"/>
+            <a:ext cx="73152" cy="658368"/>
+          </a:xfrm>
+          <a:prstGeom prst="rect">
+            <a:avLst/>
+          </a:prstGeom>
+          <a:solidFill>
+            <a:srgbClr val="DC2626"/>
+          </a:solidFill>
+          <a:ln w="12700">
+            <a:solidFill>
+              <a:srgbClr val="DC2626">
+                <a:alpha val="0"/>
+              </a:srgbClr>
+            </a:solidFill>
+            <a:prstDash val="solid"/>
+          </a:ln>
+        </p:spPr>
+      </p:sp>
+      <p:sp>
+        <p:nvSpPr>
+          <p:cNvPr id="24" name="Shape 22"/>
+          <p:cNvSpPr/>
+          <p:nvPr/>
+        </p:nvSpPr>
+        <p:spPr>
+          <a:xfrm>
+            <a:off x="822960" y="5394960"/>
+            <a:ext cx="73152" cy="658368"/>
+          </a:xfrm>
+          <a:prstGeom prst="rect">
+            <a:avLst/>
+          </a:prstGeom>
+          <a:solidFill>
+            <a:srgbClr val="111827"/>
+          </a:solidFill>
+          <a:ln w="12700">
+            <a:solidFill>
+              <a:srgbClr val="111827">
+                <a:alpha val="0"/>
+              </a:srgbClr>
+            </a:solidFill>
+            <a:prstDash val="solid"/>
+          </a:ln>
+        </p:spPr>
+      </p:sp>
+      <p:sp>
+        <p:nvSpPr>
+          <p:cNvPr id="25" name="Shape 23"/>
+          <p:cNvSpPr/>
+          <p:nvPr/>
+        </p:nvSpPr>
+        <p:spPr>
+          <a:xfrm>
+            <a:off x="6272784" y="1389888"/>
+            <a:ext cx="73152" cy="658368"/>
+          </a:xfrm>
+          <a:prstGeom prst="rect">
+            <a:avLst/>
+          </a:prstGeom>
+          <a:solidFill>
+            <a:srgbClr val="DC2626"/>
+          </a:solidFill>
+          <a:ln w="12700">
+            <a:solidFill>
+              <a:srgbClr val="DC2626">
+                <a:alpha val="0"/>
+              </a:srgbClr>
+            </a:solidFill>
+            <a:prstDash val="solid"/>
+          </a:ln>
+        </p:spPr>
+      </p:sp>
+      <p:sp>
+        <p:nvSpPr>
+          <p:cNvPr id="26" name="Shape 24"/>
+          <p:cNvSpPr/>
+          <p:nvPr/>
+        </p:nvSpPr>
+        <p:spPr>
+          <a:xfrm>
+            <a:off x="6272784" y="2194560"/>
+            <a:ext cx="73152" cy="658368"/>
+          </a:xfrm>
+          <a:prstGeom prst="rect">
+            <a:avLst/>
+          </a:prstGeom>
+          <a:solidFill>
+            <a:srgbClr val="111827"/>
+          </a:solidFill>
+          <a:ln w="12700">
+            <a:solidFill>
+              <a:srgbClr val="111827">
+                <a:alpha val="0"/>
+              </a:srgbClr>
+            </a:solidFill>
+            <a:prstDash val="solid"/>
+          </a:ln>
+        </p:spPr>
+      </p:sp>
+      <p:sp>
+        <p:nvSpPr>
+          <p:cNvPr id="27" name="Shape 25"/>
+          <p:cNvSpPr/>
+          <p:nvPr/>
+        </p:nvSpPr>
+        <p:spPr>
+          <a:xfrm>
+            <a:off x="6272784" y="2990088"/>
+            <a:ext cx="73152" cy="658368"/>
+          </a:xfrm>
+          <a:prstGeom prst="rect">
+            <a:avLst/>
+          </a:prstGeom>
+          <a:solidFill>
+            <a:srgbClr val="DC2626"/>
+          </a:solidFill>
+          <a:ln w="12700">
+            <a:solidFill>
+              <a:srgbClr val="DC2626">
+                <a:alpha val="0"/>
+              </a:srgbClr>
+            </a:solidFill>
+            <a:prstDash val="solid"/>
+          </a:ln>
+        </p:spPr>
+      </p:sp>
+      <p:sp>
+        <p:nvSpPr>
+          <p:cNvPr id="28" name="Shape 26"/>
+          <p:cNvSpPr/>
+          <p:nvPr/>
+        </p:nvSpPr>
+        <p:spPr>
+          <a:xfrm>
+            <a:off x="6272784" y="3794760"/>
+            <a:ext cx="73152" cy="658368"/>
+          </a:xfrm>
+          <a:prstGeom prst="rect">
+            <a:avLst/>
+          </a:prstGeom>
+          <a:solidFill>
+            <a:srgbClr val="111827"/>
+          </a:solidFill>
+          <a:ln w="12700">
+            <a:solidFill>
+              <a:srgbClr val="111827">
+                <a:alpha val="0"/>
+              </a:srgbClr>
+            </a:solidFill>
+            <a:prstDash val="solid"/>
+          </a:ln>
+        </p:spPr>
+      </p:sp>
+      <p:sp>
+        <p:nvSpPr>
+          <p:cNvPr id="29" name="Shape 27"/>
+          <p:cNvSpPr/>
+          <p:nvPr/>
+        </p:nvSpPr>
+        <p:spPr>
+          <a:xfrm>
+            <a:off x="6272784" y="4599432"/>
+            <a:ext cx="73152" cy="658368"/>
+          </a:xfrm>
+          <a:prstGeom prst="rect">
+            <a:avLst/>
+          </a:prstGeom>
+          <a:solidFill>
+            <a:srgbClr val="DC2626"/>
+          </a:solidFill>
+          <a:ln w="12700">
+            <a:solidFill>
+              <a:srgbClr val="DC2626">
+                <a:alpha val="0"/>
+              </a:srgbClr>
+            </a:solidFill>
+            <a:prstDash val="solid"/>
+          </a:ln>
+        </p:spPr>
+      </p:sp>
+      <p:sp>
+        <p:nvSpPr>
+          <p:cNvPr id="30" name="Shape 28"/>
+          <p:cNvSpPr/>
+          <p:nvPr/>
+        </p:nvSpPr>
+        <p:spPr>
+          <a:xfrm>
+            <a:off x="6272784" y="5394960"/>
+            <a:ext cx="73152" cy="658368"/>
+          </a:xfrm>
+          <a:prstGeom prst="rect">
+            <a:avLst/>
+          </a:prstGeom>
+          <a:solidFill>
+            <a:srgbClr val="111827"/>
+          </a:solidFill>
+          <a:ln w="12700">
+            <a:solidFill>
+              <a:srgbClr val="111827">
+                <a:alpha val="0"/>
+              </a:srgbClr>
+            </a:solidFill>
+            <a:prstDash val="solid"/>
+          </a:ln>
+        </p:spPr>
+      </p:sp>
+      <p:sp>
+        <p:nvSpPr>
+          <p:cNvPr id="31" name="Text 29"/>
           <p:cNvSpPr txBox="1"/>
           <p:nvPr/>
         </p:nvSpPr>
@@ -13817,14 +14226,14 @@
       </p:sp>
       <p:sp>
         <p:nvSpPr>
-          <p:cNvPr id="18" name="Text 16"/>
+          <p:cNvPr id="32" name="Text 30"/>
           <p:cNvSpPr txBox="1"/>
           <p:nvPr/>
         </p:nvSpPr>
         <p:spPr>
           <a:xfrm>
-            <a:off x="987552" y="1572768"/>
-            <a:ext cx="10094976" cy="355092"/>
+            <a:off x="1042416" y="1481328"/>
+            <a:ext cx="4645152" cy="475488"/>
           </a:xfrm>
           <a:prstGeom prst="rect">
             <a:avLst/>
@@ -13836,14 +14245,14 @@
           <a:bodyPr wrap="square" lIns="0" tIns="25400" rIns="25400" bIns="0" rtlCol="0" anchor="ctr"/>
           <a:lstStyle/>
           <a:p>
-            <a:pPr algn="l" indent="0" marL="0">
+            <a:pPr algn="ctr" indent="0" marL="0">
               <a:lnSpc>
                 <a:spcPct val="120000"/>
               </a:lnSpc>
               <a:buNone/>
             </a:pPr>
             <a:r>
-              <a:rPr lang="en-US" sz="2200" dirty="0">
+              <a:rPr lang="en-US" sz="1800" dirty="0">
                 <a:solidFill>
                   <a:srgbClr val="111827"/>
                 </a:solidFill>
@@ -13851,22 +14260,22 @@
                 <a:ea typeface="Pretendard" pitchFamily="34" charset="-122"/>
                 <a:cs typeface="Pretendard" pitchFamily="34" charset="-120"/>
               </a:rPr>
-              <a:t>Preview Purpose</a:t>
+              <a:t>01  Preview Purpose</a:t>
             </a:r>
-            <a:endParaRPr lang="en-US" sz="2200" dirty="0"/>
+            <a:endParaRPr lang="en-US" sz="1800" dirty="0"/>
           </a:p>
         </p:txBody>
       </p:sp>
       <p:sp>
         <p:nvSpPr>
-          <p:cNvPr id="19" name="Text 17"/>
+          <p:cNvPr id="33" name="Text 31"/>
           <p:cNvSpPr txBox="1"/>
           <p:nvPr/>
         </p:nvSpPr>
         <p:spPr>
           <a:xfrm>
-            <a:off x="987552" y="1927860"/>
-            <a:ext cx="10094976" cy="355092"/>
+            <a:off x="1042416" y="2286000"/>
+            <a:ext cx="4645152" cy="475488"/>
           </a:xfrm>
           <a:prstGeom prst="rect">
             <a:avLst/>
@@ -13878,14 +14287,14 @@
           <a:bodyPr wrap="square" lIns="0" tIns="25400" rIns="25400" bIns="0" rtlCol="0" anchor="ctr"/>
           <a:lstStyle/>
           <a:p>
-            <a:pPr algn="l" indent="0" marL="0">
+            <a:pPr algn="ctr" indent="0" marL="0">
               <a:lnSpc>
                 <a:spcPct val="120000"/>
               </a:lnSpc>
               <a:buNone/>
             </a:pPr>
             <a:r>
-              <a:rPr lang="en-US" sz="2200" dirty="0">
+              <a:rPr lang="en-US" sz="1800" dirty="0">
                 <a:solidFill>
                   <a:srgbClr val="111827"/>
                 </a:solidFill>
@@ -13893,22 +14302,22 @@
                 <a:ea typeface="Pretendard" pitchFamily="34" charset="-122"/>
                 <a:cs typeface="Pretendard" pitchFamily="34" charset="-120"/>
               </a:rPr>
-              <a:t>Composition Contract</a:t>
+              <a:t>02  Composition Contract</a:t>
             </a:r>
-            <a:endParaRPr lang="en-US" sz="2200" dirty="0"/>
+            <a:endParaRPr lang="en-US" sz="1800" dirty="0"/>
           </a:p>
         </p:txBody>
       </p:sp>
       <p:sp>
         <p:nvSpPr>
-          <p:cNvPr id="20" name="Text 18"/>
+          <p:cNvPr id="34" name="Text 32"/>
           <p:cNvSpPr txBox="1"/>
           <p:nvPr/>
         </p:nvSpPr>
         <p:spPr>
           <a:xfrm>
-            <a:off x="987552" y="2282952"/>
-            <a:ext cx="10094976" cy="355092"/>
+            <a:off x="1042416" y="3081528"/>
+            <a:ext cx="4645152" cy="475488"/>
           </a:xfrm>
           <a:prstGeom prst="rect">
             <a:avLst/>
@@ -13920,14 +14329,14 @@
           <a:bodyPr wrap="square" lIns="0" tIns="25400" rIns="25400" bIns="0" rtlCol="0" anchor="ctr"/>
           <a:lstStyle/>
           <a:p>
-            <a:pPr algn="l" indent="0" marL="0">
+            <a:pPr algn="ctr" indent="0" marL="0">
               <a:lnSpc>
                 <a:spcPct val="120000"/>
               </a:lnSpc>
               <a:buNone/>
             </a:pPr>
             <a:r>
-              <a:rPr lang="en-US" sz="2200" dirty="0">
+              <a:rPr lang="en-US" sz="1800" dirty="0">
                 <a:solidFill>
                   <a:srgbClr val="111827"/>
                 </a:solidFill>
@@ -13935,22 +14344,22 @@
                 <a:ea typeface="Pretendard" pitchFamily="34" charset="-122"/>
                 <a:cs typeface="Pretendard" pitchFamily="34" charset="-120"/>
               </a:rPr>
-              <a:t>Style Families</a:t>
+              <a:t>03  Style Families</a:t>
             </a:r>
-            <a:endParaRPr lang="en-US" sz="2200" dirty="0"/>
+            <a:endParaRPr lang="en-US" sz="1800" dirty="0"/>
           </a:p>
         </p:txBody>
       </p:sp>
       <p:sp>
         <p:nvSpPr>
-          <p:cNvPr id="21" name="Text 19"/>
+          <p:cNvPr id="35" name="Text 33"/>
           <p:cNvSpPr txBox="1"/>
           <p:nvPr/>
         </p:nvSpPr>
         <p:spPr>
           <a:xfrm>
-            <a:off x="987552" y="2638044"/>
-            <a:ext cx="10094976" cy="355092"/>
+            <a:off x="1042416" y="3886200"/>
+            <a:ext cx="4645152" cy="475488"/>
           </a:xfrm>
           <a:prstGeom prst="rect">
             <a:avLst/>
@@ -13962,14 +14371,14 @@
           <a:bodyPr wrap="square" lIns="0" tIns="25400" rIns="25400" bIns="0" rtlCol="0" anchor="ctr"/>
           <a:lstStyle/>
           <a:p>
-            <a:pPr algn="l" indent="0" marL="0">
+            <a:pPr algn="ctr" indent="0" marL="0">
               <a:lnSpc>
                 <a:spcPct val="120000"/>
               </a:lnSpc>
               <a:buNone/>
             </a:pPr>
             <a:r>
-              <a:rPr lang="en-US" sz="2200" dirty="0">
+              <a:rPr lang="en-US" sz="1800" dirty="0">
                 <a:solidFill>
                   <a:srgbClr val="111827"/>
                 </a:solidFill>
@@ -13977,22 +14386,22 @@
                 <a:ea typeface="Pretendard" pitchFamily="34" charset="-122"/>
                 <a:cs typeface="Pretendard" pitchFamily="34" charset="-120"/>
               </a:rPr>
-              <a:t>Semantic Blocks</a:t>
+              <a:t>04  Semantic Blocks</a:t>
             </a:r>
-            <a:endParaRPr lang="en-US" sz="2200" dirty="0"/>
+            <a:endParaRPr lang="en-US" sz="1800" dirty="0"/>
           </a:p>
         </p:txBody>
       </p:sp>
       <p:sp>
         <p:nvSpPr>
-          <p:cNvPr id="22" name="Text 20"/>
+          <p:cNvPr id="36" name="Text 34"/>
           <p:cNvSpPr txBox="1"/>
           <p:nvPr/>
         </p:nvSpPr>
         <p:spPr>
           <a:xfrm>
-            <a:off x="987552" y="2993136"/>
-            <a:ext cx="10094976" cy="355092"/>
+            <a:off x="1042416" y="4690872"/>
+            <a:ext cx="4645152" cy="475488"/>
           </a:xfrm>
           <a:prstGeom prst="rect">
             <a:avLst/>
@@ -14004,14 +14413,14 @@
           <a:bodyPr wrap="square" lIns="0" tIns="25400" rIns="25400" bIns="0" rtlCol="0" anchor="ctr"/>
           <a:lstStyle/>
           <a:p>
-            <a:pPr algn="l" indent="0" marL="0">
+            <a:pPr algn="ctr" indent="0" marL="0">
               <a:lnSpc>
                 <a:spcPct val="120000"/>
               </a:lnSpc>
               <a:buNone/>
             </a:pPr>
             <a:r>
-              <a:rPr lang="en-US" sz="2200" dirty="0">
+              <a:rPr lang="en-US" sz="1800" dirty="0">
                 <a:solidFill>
                   <a:srgbClr val="111827"/>
                 </a:solidFill>
@@ -14019,22 +14428,22 @@
                 <a:ea typeface="Pretendard" pitchFamily="34" charset="-122"/>
                 <a:cs typeface="Pretendard" pitchFamily="34" charset="-120"/>
               </a:rPr>
-              <a:t>Pipeline Diagram</a:t>
+              <a:t>05  Pipeline Diagram</a:t>
             </a:r>
-            <a:endParaRPr lang="en-US" sz="2200" dirty="0"/>
+            <a:endParaRPr lang="en-US" sz="1800" dirty="0"/>
           </a:p>
         </p:txBody>
       </p:sp>
       <p:sp>
         <p:nvSpPr>
-          <p:cNvPr id="23" name="Text 21"/>
+          <p:cNvPr id="37" name="Text 35"/>
           <p:cNvSpPr txBox="1"/>
           <p:nvPr/>
         </p:nvSpPr>
         <p:spPr>
           <a:xfrm>
-            <a:off x="987552" y="3348228"/>
-            <a:ext cx="10094976" cy="355092"/>
+            <a:off x="1042416" y="5486400"/>
+            <a:ext cx="4645152" cy="475488"/>
           </a:xfrm>
           <a:prstGeom prst="rect">
             <a:avLst/>
@@ -14046,14 +14455,14 @@
           <a:bodyPr wrap="square" lIns="0" tIns="25400" rIns="25400" bIns="0" rtlCol="0" anchor="ctr"/>
           <a:lstStyle/>
           <a:p>
-            <a:pPr algn="l" indent="0" marL="0">
+            <a:pPr algn="ctr" indent="0" marL="0">
               <a:lnSpc>
                 <a:spcPct val="120000"/>
               </a:lnSpc>
               <a:buNone/>
             </a:pPr>
             <a:r>
-              <a:rPr lang="en-US" sz="2200" dirty="0">
+              <a:rPr lang="en-US" sz="1800" dirty="0">
                 <a:solidFill>
                   <a:srgbClr val="111827"/>
                 </a:solidFill>
@@ -14061,22 +14470,22 @@
                 <a:ea typeface="Pretendard" pitchFamily="34" charset="-122"/>
                 <a:cs typeface="Pretendard" pitchFamily="34" charset="-120"/>
               </a:rPr>
-              <a:t>Table Coherence</a:t>
+              <a:t>06  Table Coherence</a:t>
             </a:r>
-            <a:endParaRPr lang="en-US" sz="2200" dirty="0"/>
+            <a:endParaRPr lang="en-US" sz="1800" dirty="0"/>
           </a:p>
         </p:txBody>
       </p:sp>
       <p:sp>
         <p:nvSpPr>
-          <p:cNvPr id="24" name="Text 22"/>
+          <p:cNvPr id="38" name="Text 36"/>
           <p:cNvSpPr txBox="1"/>
           <p:nvPr/>
         </p:nvSpPr>
         <p:spPr>
           <a:xfrm>
-            <a:off x="987552" y="3703320"/>
-            <a:ext cx="10094976" cy="355092"/>
+            <a:off x="6492240" y="1481328"/>
+            <a:ext cx="4645152" cy="475488"/>
           </a:xfrm>
           <a:prstGeom prst="rect">
             <a:avLst/>
@@ -14088,14 +14497,14 @@
           <a:bodyPr wrap="square" lIns="0" tIns="25400" rIns="25400" bIns="0" rtlCol="0" anchor="ctr"/>
           <a:lstStyle/>
           <a:p>
-            <a:pPr algn="l" indent="0" marL="0">
+            <a:pPr algn="ctr" indent="0" marL="0">
               <a:lnSpc>
                 <a:spcPct val="120000"/>
               </a:lnSpc>
               <a:buNone/>
             </a:pPr>
             <a:r>
-              <a:rPr lang="en-US" sz="2200" dirty="0">
+              <a:rPr lang="en-US" sz="1800" dirty="0">
                 <a:solidFill>
                   <a:srgbClr val="111827"/>
                 </a:solidFill>
@@ -14103,22 +14512,22 @@
                 <a:ea typeface="Pretendard" pitchFamily="34" charset="-122"/>
                 <a:cs typeface="Pretendard" pitchFamily="34" charset="-120"/>
               </a:rPr>
-              <a:t>Chart and Table Pair</a:t>
+              <a:t>07  Chart and Table Pair</a:t>
             </a:r>
-            <a:endParaRPr lang="en-US" sz="2200" dirty="0"/>
+            <a:endParaRPr lang="en-US" sz="1800" dirty="0"/>
           </a:p>
         </p:txBody>
       </p:sp>
       <p:sp>
         <p:nvSpPr>
-          <p:cNvPr id="25" name="Text 23"/>
+          <p:cNvPr id="39" name="Text 37"/>
           <p:cNvSpPr txBox="1"/>
           <p:nvPr/>
         </p:nvSpPr>
         <p:spPr>
           <a:xfrm>
-            <a:off x="987552" y="4058412"/>
-            <a:ext cx="10094976" cy="355092"/>
+            <a:off x="6492240" y="2286000"/>
+            <a:ext cx="4645152" cy="475488"/>
           </a:xfrm>
           <a:prstGeom prst="rect">
             <a:avLst/>
@@ -14130,14 +14539,14 @@
           <a:bodyPr wrap="square" lIns="0" tIns="25400" rIns="25400" bIns="0" rtlCol="0" anchor="ctr"/>
           <a:lstStyle/>
           <a:p>
-            <a:pPr algn="l" indent="0" marL="0">
+            <a:pPr algn="ctr" indent="0" marL="0">
               <a:lnSpc>
                 <a:spcPct val="120000"/>
               </a:lnSpc>
               <a:buNone/>
             </a:pPr>
             <a:r>
-              <a:rPr lang="en-US" sz="2200" dirty="0">
+              <a:rPr lang="en-US" sz="1800" dirty="0">
                 <a:solidFill>
                   <a:srgbClr val="111827"/>
                 </a:solidFill>
@@ -14145,22 +14554,22 @@
                 <a:ea typeface="Pretendard" pitchFamily="34" charset="-122"/>
                 <a:cs typeface="Pretendard" pitchFamily="34" charset="-120"/>
               </a:rPr>
-              <a:t>Editable Proof Objects</a:t>
+              <a:t>08  Editable Proof Objects</a:t>
             </a:r>
-            <a:endParaRPr lang="en-US" sz="2200" dirty="0"/>
+            <a:endParaRPr lang="en-US" sz="1800" dirty="0"/>
           </a:p>
         </p:txBody>
       </p:sp>
       <p:sp>
         <p:nvSpPr>
-          <p:cNvPr id="26" name="Text 24"/>
+          <p:cNvPr id="40" name="Text 38"/>
           <p:cNvSpPr txBox="1"/>
           <p:nvPr/>
         </p:nvSpPr>
         <p:spPr>
           <a:xfrm>
-            <a:off x="987552" y="4413504"/>
-            <a:ext cx="10094976" cy="355092"/>
+            <a:off x="6492240" y="3081528"/>
+            <a:ext cx="4645152" cy="475488"/>
           </a:xfrm>
           <a:prstGeom prst="rect">
             <a:avLst/>
@@ -14172,14 +14581,14 @@
           <a:bodyPr wrap="square" lIns="0" tIns="25400" rIns="25400" bIns="0" rtlCol="0" anchor="ctr"/>
           <a:lstStyle/>
           <a:p>
-            <a:pPr algn="l" indent="0" marL="0">
+            <a:pPr algn="ctr" indent="0" marL="0">
               <a:lnSpc>
                 <a:spcPct val="120000"/>
               </a:lnSpc>
               <a:buNone/>
             </a:pPr>
             <a:r>
-              <a:rPr lang="en-US" sz="2200" dirty="0">
+              <a:rPr lang="en-US" sz="1800" dirty="0">
                 <a:solidFill>
                   <a:srgbClr val="111827"/>
                 </a:solidFill>
@@ -14187,22 +14596,22 @@
                 <a:ea typeface="Pretendard" pitchFamily="34" charset="-122"/>
                 <a:cs typeface="Pretendard" pitchFamily="34" charset="-120"/>
               </a:rPr>
-              <a:t>Object Shape Grammar</a:t>
+              <a:t>09  Object Shape Grammar</a:t>
             </a:r>
-            <a:endParaRPr lang="en-US" sz="2200" dirty="0"/>
+            <a:endParaRPr lang="en-US" sz="1800" dirty="0"/>
           </a:p>
         </p:txBody>
       </p:sp>
       <p:sp>
         <p:nvSpPr>
-          <p:cNvPr id="27" name="Text 25"/>
+          <p:cNvPr id="41" name="Text 39"/>
           <p:cNvSpPr txBox="1"/>
           <p:nvPr/>
         </p:nvSpPr>
         <p:spPr>
           <a:xfrm>
-            <a:off x="987552" y="4768596"/>
-            <a:ext cx="10094976" cy="355092"/>
+            <a:off x="6492240" y="3886200"/>
+            <a:ext cx="4645152" cy="475488"/>
           </a:xfrm>
           <a:prstGeom prst="rect">
             <a:avLst/>
@@ -14214,14 +14623,14 @@
           <a:bodyPr wrap="square" lIns="0" tIns="25400" rIns="25400" bIns="0" rtlCol="0" anchor="ctr"/>
           <a:lstStyle/>
           <a:p>
-            <a:pPr algn="l" indent="0" marL="0">
+            <a:pPr algn="ctr" indent="0" marL="0">
               <a:lnSpc>
                 <a:spcPct val="120000"/>
               </a:lnSpc>
               <a:buNone/>
             </a:pPr>
             <a:r>
-              <a:rPr lang="en-US" sz="2200" dirty="0">
+              <a:rPr lang="en-US" sz="1800" dirty="0">
                 <a:solidFill>
                   <a:srgbClr val="111827"/>
                 </a:solidFill>
@@ -14229,22 +14638,22 @@
                 <a:ea typeface="Pretendard" pitchFamily="34" charset="-122"/>
                 <a:cs typeface="Pretendard" pitchFamily="34" charset="-120"/>
               </a:rPr>
-              <a:t>Icon and Text Aside</a:t>
+              <a:t>10  Icon and Text Aside</a:t>
             </a:r>
-            <a:endParaRPr lang="en-US" sz="2200" dirty="0"/>
+            <a:endParaRPr lang="en-US" sz="1800" dirty="0"/>
           </a:p>
         </p:txBody>
       </p:sp>
       <p:sp>
         <p:nvSpPr>
-          <p:cNvPr id="28" name="Text 26"/>
+          <p:cNvPr id="42" name="Text 40"/>
           <p:cNvSpPr txBox="1"/>
           <p:nvPr/>
         </p:nvSpPr>
         <p:spPr>
           <a:xfrm>
-            <a:off x="987552" y="5123688"/>
-            <a:ext cx="10094976" cy="355092"/>
+            <a:off x="6492240" y="4690872"/>
+            <a:ext cx="4645152" cy="475488"/>
           </a:xfrm>
           <a:prstGeom prst="rect">
             <a:avLst/>
@@ -14256,14 +14665,14 @@
           <a:bodyPr wrap="square" lIns="0" tIns="25400" rIns="25400" bIns="0" rtlCol="0" anchor="ctr"/>
           <a:lstStyle/>
           <a:p>
-            <a:pPr algn="l" indent="0" marL="0">
+            <a:pPr algn="ctr" indent="0" marL="0">
               <a:lnSpc>
                 <a:spcPct val="120000"/>
               </a:lnSpc>
               <a:buNone/>
             </a:pPr>
             <a:r>
-              <a:rPr lang="en-US" sz="2200" dirty="0">
+              <a:rPr lang="en-US" sz="1800" dirty="0">
                 <a:solidFill>
                   <a:srgbClr val="111827"/>
                 </a:solidFill>
@@ -14271,22 +14680,22 @@
                 <a:ea typeface="Pretendard" pitchFamily="34" charset="-122"/>
                 <a:cs typeface="Pretendard" pitchFamily="34" charset="-120"/>
               </a:rPr>
-              <a:t>Overflow Guard</a:t>
+              <a:t>11  Overflow Guard</a:t>
             </a:r>
-            <a:endParaRPr lang="en-US" sz="2200" dirty="0"/>
+            <a:endParaRPr lang="en-US" sz="1800" dirty="0"/>
           </a:p>
         </p:txBody>
       </p:sp>
       <p:sp>
         <p:nvSpPr>
-          <p:cNvPr id="29" name="Text 27"/>
+          <p:cNvPr id="43" name="Text 41"/>
           <p:cNvSpPr txBox="1"/>
           <p:nvPr/>
         </p:nvSpPr>
         <p:spPr>
           <a:xfrm>
-            <a:off x="987552" y="5478780"/>
-            <a:ext cx="10094976" cy="355092"/>
+            <a:off x="6492240" y="5486400"/>
+            <a:ext cx="4645152" cy="475488"/>
           </a:xfrm>
           <a:prstGeom prst="rect">
             <a:avLst/>
@@ -14298,14 +14707,14 @@
           <a:bodyPr wrap="square" lIns="0" tIns="25400" rIns="25400" bIns="0" rtlCol="0" anchor="ctr"/>
           <a:lstStyle/>
           <a:p>
-            <a:pPr algn="l" indent="0" marL="0">
+            <a:pPr algn="ctr" indent="0" marL="0">
               <a:lnSpc>
                 <a:spcPct val="120000"/>
               </a:lnSpc>
               <a:buNone/>
             </a:pPr>
             <a:r>
-              <a:rPr lang="en-US" sz="2200" dirty="0">
+              <a:rPr lang="en-US" sz="1800" dirty="0">
                 <a:solidFill>
                   <a:srgbClr val="111827"/>
                 </a:solidFill>
@@ -14313,9 +14722,9 @@
                 <a:ea typeface="Pretendard" pitchFamily="34" charset="-122"/>
                 <a:cs typeface="Pretendard" pitchFamily="34" charset="-120"/>
               </a:rPr>
-              <a:t>Actions Output Review</a:t>
+              <a:t>12  Actions Output Review</a:t>
             </a:r>
-            <a:endParaRPr lang="en-US" sz="2200" dirty="0"/>
+            <a:endParaRPr lang="en-US" sz="1800" dirty="0"/>
           </a:p>
         </p:txBody>
       </p:sp>
@@ -15408,8 +15817,37 @@
         </p:nvSpPr>
         <p:spPr>
           <a:xfrm>
-            <a:off x="914400" y="1417320"/>
-            <a:ext cx="73152" cy="868680"/>
+            <a:off x="786384" y="1956816"/>
+            <a:ext cx="32004" cy="3483864"/>
+          </a:xfrm>
+          <a:prstGeom prst="rect">
+            <a:avLst/>
+          </a:prstGeom>
+          <a:solidFill>
+            <a:srgbClr val="111827">
+              <a:alpha val="80000"/>
+            </a:srgbClr>
+          </a:solidFill>
+          <a:ln w="12700">
+            <a:solidFill>
+              <a:srgbClr val="111827">
+                <a:alpha val="0"/>
+              </a:srgbClr>
+            </a:solidFill>
+            <a:prstDash val="solid"/>
+          </a:ln>
+        </p:spPr>
+      </p:sp>
+      <p:sp>
+        <p:nvSpPr>
+          <p:cNvPr id="17" name="Shape 15"/>
+          <p:cNvSpPr/>
+          <p:nvPr/>
+        </p:nvSpPr>
+        <p:spPr>
+          <a:xfrm>
+            <a:off x="914400" y="1865376"/>
+            <a:ext cx="73152" cy="1024128"/>
           </a:xfrm>
           <a:prstGeom prst="rect">
             <a:avLst/>
@@ -15429,14 +15867,14 @@
       </p:sp>
       <p:sp>
         <p:nvSpPr>
-          <p:cNvPr id="17" name="Shape 15"/>
-          <p:cNvSpPr/>
-          <p:nvPr/>
-        </p:nvSpPr>
-        <p:spPr>
-          <a:xfrm>
-            <a:off x="914400" y="2560320"/>
-            <a:ext cx="73152" cy="868680"/>
+          <p:cNvPr id="18" name="Shape 16"/>
+          <p:cNvSpPr/>
+          <p:nvPr/>
+        </p:nvSpPr>
+        <p:spPr>
+          <a:xfrm>
+            <a:off x="914400" y="3191256"/>
+            <a:ext cx="73152" cy="1024128"/>
           </a:xfrm>
           <a:prstGeom prst="rect">
             <a:avLst/>
@@ -15456,14 +15894,14 @@
       </p:sp>
       <p:sp>
         <p:nvSpPr>
-          <p:cNvPr id="18" name="Shape 16"/>
-          <p:cNvSpPr/>
-          <p:nvPr/>
-        </p:nvSpPr>
-        <p:spPr>
-          <a:xfrm>
-            <a:off x="914400" y="3703320"/>
-            <a:ext cx="73152" cy="868680"/>
+          <p:cNvPr id="19" name="Shape 17"/>
+          <p:cNvSpPr/>
+          <p:nvPr/>
+        </p:nvSpPr>
+        <p:spPr>
+          <a:xfrm>
+            <a:off x="914400" y="4507992"/>
+            <a:ext cx="73152" cy="1024128"/>
           </a:xfrm>
           <a:prstGeom prst="rect">
             <a:avLst/>
@@ -15483,7 +15921,7 @@
       </p:sp>
       <p:pic>
         <p:nvPicPr>
-          <p:cNvPr id="19" name="Image 0" descr="preencoded.png">    </p:cNvPr>
+          <p:cNvPr id="20" name="Image 0" descr="preencoded.png">    </p:cNvPr>
           <p:cNvPicPr>
             <a:picLocks noChangeAspect="1"/>
           </p:cNvPicPr>
@@ -15503,8 +15941,8 @@
         </p:blipFill>
         <p:spPr>
           <a:xfrm>
-            <a:off x="914400" y="1417320"/>
-            <a:ext cx="10241280" cy="868680"/>
+            <a:off x="914400" y="1865376"/>
+            <a:ext cx="10241280" cy="1024128"/>
           </a:xfrm>
           <a:prstGeom prst="rect">
             <a:avLst/>
@@ -15513,7 +15951,7 @@
       </p:pic>
       <p:pic>
         <p:nvPicPr>
-          <p:cNvPr id="20" name="Image 1" descr="preencoded.png">    </p:cNvPr>
+          <p:cNvPr id="21" name="Image 1" descr="preencoded.png">    </p:cNvPr>
           <p:cNvPicPr>
             <a:picLocks noChangeAspect="1"/>
           </p:cNvPicPr>
@@ -15533,8 +15971,8 @@
         </p:blipFill>
         <p:spPr>
           <a:xfrm>
-            <a:off x="914400" y="2560320"/>
-            <a:ext cx="10241280" cy="868680"/>
+            <a:off x="914400" y="3191256"/>
+            <a:ext cx="10241280" cy="1024128"/>
           </a:xfrm>
           <a:prstGeom prst="rect">
             <a:avLst/>
@@ -15543,7 +15981,7 @@
       </p:pic>
       <p:pic>
         <p:nvPicPr>
-          <p:cNvPr id="21" name="Image 2" descr="preencoded.png">    </p:cNvPr>
+          <p:cNvPr id="22" name="Image 2" descr="preencoded.png">    </p:cNvPr>
           <p:cNvPicPr>
             <a:picLocks noChangeAspect="1"/>
           </p:cNvPicPr>
@@ -15563,8 +16001,8 @@
         </p:blipFill>
         <p:spPr>
           <a:xfrm>
-            <a:off x="914400" y="3703320"/>
-            <a:ext cx="10241280" cy="868680"/>
+            <a:off x="914400" y="4507992"/>
+            <a:ext cx="10241280" cy="1024128"/>
           </a:xfrm>
           <a:prstGeom prst="rect">
             <a:avLst/>
@@ -15573,7 +16011,7 @@
       </p:pic>
       <p:sp>
         <p:nvSpPr>
-          <p:cNvPr id="22" name="Text 17"/>
+          <p:cNvPr id="23" name="Text 18"/>
           <p:cNvSpPr txBox="1"/>
           <p:nvPr/>
         </p:nvSpPr>
@@ -15615,18 +16053,18 @@
       </p:sp>
       <p:sp>
         <p:nvSpPr>
-          <p:cNvPr id="23" name="Shape 18"/>
-          <p:cNvSpPr/>
-          <p:nvPr/>
-        </p:nvSpPr>
-        <p:spPr>
-          <a:xfrm>
-            <a:off x="1097280" y="1623060"/>
-            <a:ext cx="457200" cy="457200"/>
+          <p:cNvPr id="24" name="Shape 19"/>
+          <p:cNvSpPr/>
+          <p:nvPr/>
+        </p:nvSpPr>
+        <p:spPr>
+          <a:xfrm>
+            <a:off x="1097280" y="2140428"/>
+            <a:ext cx="474025" cy="474025"/>
           </a:xfrm>
           <a:prstGeom prst="roundRect">
             <a:avLst>
-              <a:gd name="adj" fmla="val 8000"/>
+              <a:gd name="adj" fmla="val 7716"/>
             </a:avLst>
           </a:prstGeom>
           <a:solidFill>
@@ -15642,7 +16080,7 @@
       </p:sp>
       <p:pic>
         <p:nvPicPr>
-          <p:cNvPr id="24" name="Image 3" descr="flow icon from tabler-icons (MIT)">    </p:cNvPr>
+          <p:cNvPr id="25" name="Image 3" descr="flow icon from tabler-icons (MIT)">    </p:cNvPr>
           <p:cNvPicPr>
             <a:picLocks noChangeAspect="1"/>
           </p:cNvPicPr>
@@ -15662,8 +16100,8 @@
         </p:blipFill>
         <p:spPr>
           <a:xfrm>
-            <a:off x="1170432" y="1696212"/>
-            <a:ext cx="310896" cy="310896"/>
+            <a:off x="1170432" y="2213580"/>
+            <a:ext cx="327721" cy="327721"/>
           </a:xfrm>
           <a:prstGeom prst="rect">
             <a:avLst/>
@@ -15672,14 +16110,14 @@
       </p:pic>
       <p:sp>
         <p:nvSpPr>
-          <p:cNvPr id="25" name="Text 19"/>
+          <p:cNvPr id="26" name="Text 20"/>
           <p:cNvSpPr txBox="1"/>
           <p:nvPr/>
         </p:nvSpPr>
         <p:spPr>
           <a:xfrm>
-            <a:off x="1682496" y="1508760"/>
-            <a:ext cx="9272016" cy="685800"/>
+            <a:off x="1699321" y="1957548"/>
+            <a:ext cx="9255191" cy="839785"/>
           </a:xfrm>
           <a:prstGeom prst="rect">
             <a:avLst/>
@@ -15731,18 +16169,18 @@
       </p:sp>
       <p:sp>
         <p:nvSpPr>
-          <p:cNvPr id="26" name="Shape 20"/>
-          <p:cNvSpPr/>
-          <p:nvPr/>
-        </p:nvSpPr>
-        <p:spPr>
-          <a:xfrm>
-            <a:off x="1097280" y="2766060"/>
-            <a:ext cx="457200" cy="457200"/>
+          <p:cNvPr id="27" name="Shape 21"/>
+          <p:cNvSpPr/>
+          <p:nvPr/>
+        </p:nvSpPr>
+        <p:spPr>
+          <a:xfrm>
+            <a:off x="1097280" y="3466308"/>
+            <a:ext cx="474025" cy="474025"/>
           </a:xfrm>
           <a:prstGeom prst="roundRect">
             <a:avLst>
-              <a:gd name="adj" fmla="val 8000"/>
+              <a:gd name="adj" fmla="val 7716"/>
             </a:avLst>
           </a:prstGeom>
           <a:solidFill>
@@ -15758,7 +16196,7 @@
       </p:sp>
       <p:pic>
         <p:nvPicPr>
-          <p:cNvPr id="27" name="Image 4" descr="verified icon from tabler-icons (MIT)">    </p:cNvPr>
+          <p:cNvPr id="28" name="Image 4" descr="verified icon from tabler-icons (MIT)">    </p:cNvPr>
           <p:cNvPicPr>
             <a:picLocks noChangeAspect="1"/>
           </p:cNvPicPr>
@@ -15778,8 +16216,8 @@
         </p:blipFill>
         <p:spPr>
           <a:xfrm>
-            <a:off x="1170432" y="2839212"/>
-            <a:ext cx="310896" cy="310896"/>
+            <a:off x="1170432" y="3539460"/>
+            <a:ext cx="327721" cy="327721"/>
           </a:xfrm>
           <a:prstGeom prst="rect">
             <a:avLst/>
@@ -15788,14 +16226,14 @@
       </p:pic>
       <p:sp>
         <p:nvSpPr>
-          <p:cNvPr id="28" name="Text 21"/>
+          <p:cNvPr id="29" name="Text 22"/>
           <p:cNvSpPr txBox="1"/>
           <p:nvPr/>
         </p:nvSpPr>
         <p:spPr>
           <a:xfrm>
-            <a:off x="1682496" y="2651760"/>
-            <a:ext cx="9272016" cy="685800"/>
+            <a:off x="1699321" y="3283428"/>
+            <a:ext cx="9255191" cy="839785"/>
           </a:xfrm>
           <a:prstGeom prst="rect">
             <a:avLst/>
@@ -15847,18 +16285,18 @@
       </p:sp>
       <p:sp>
         <p:nvSpPr>
-          <p:cNvPr id="29" name="Shape 22"/>
-          <p:cNvSpPr/>
-          <p:nvPr/>
-        </p:nvSpPr>
-        <p:spPr>
-          <a:xfrm>
-            <a:off x="1097280" y="3909060"/>
-            <a:ext cx="457200" cy="457200"/>
+          <p:cNvPr id="30" name="Shape 23"/>
+          <p:cNvSpPr/>
+          <p:nvPr/>
+        </p:nvSpPr>
+        <p:spPr>
+          <a:xfrm>
+            <a:off x="1097280" y="4783044"/>
+            <a:ext cx="474025" cy="474025"/>
           </a:xfrm>
           <a:prstGeom prst="roundRect">
             <a:avLst>
-              <a:gd name="adj" fmla="val 8000"/>
+              <a:gd name="adj" fmla="val 7716"/>
             </a:avLst>
           </a:prstGeom>
           <a:solidFill>
@@ -15874,7 +16312,7 @@
       </p:sp>
       <p:pic>
         <p:nvPicPr>
-          <p:cNvPr id="30" name="Image 5" descr="spark icon from tabler-icons (MIT)">    </p:cNvPr>
+          <p:cNvPr id="31" name="Image 5" descr="spark icon from tabler-icons (MIT)">    </p:cNvPr>
           <p:cNvPicPr>
             <a:picLocks noChangeAspect="1"/>
           </p:cNvPicPr>
@@ -15894,8 +16332,8 @@
         </p:blipFill>
         <p:spPr>
           <a:xfrm>
-            <a:off x="1170432" y="3982212"/>
-            <a:ext cx="310896" cy="310896"/>
+            <a:off x="1170432" y="4856196"/>
+            <a:ext cx="327721" cy="327721"/>
           </a:xfrm>
           <a:prstGeom prst="rect">
             <a:avLst/>
@@ -15904,14 +16342,14 @@
       </p:pic>
       <p:sp>
         <p:nvSpPr>
-          <p:cNvPr id="31" name="Text 23"/>
+          <p:cNvPr id="32" name="Text 24"/>
           <p:cNvSpPr txBox="1"/>
           <p:nvPr/>
         </p:nvSpPr>
         <p:spPr>
           <a:xfrm>
-            <a:off x="1682496" y="3794760"/>
-            <a:ext cx="9272016" cy="685800"/>
+            <a:off x="1699321" y="4600164"/>
+            <a:ext cx="9255191" cy="839785"/>
           </a:xfrm>
           <a:prstGeom prst="rect">
             <a:avLst/>
@@ -16955,8 +17393,37 @@
         </p:nvSpPr>
         <p:spPr>
           <a:xfrm>
-            <a:off x="914400" y="1417320"/>
-            <a:ext cx="73152" cy="868680"/>
+            <a:off x="786384" y="1956816"/>
+            <a:ext cx="32004" cy="3483864"/>
+          </a:xfrm>
+          <a:prstGeom prst="rect">
+            <a:avLst/>
+          </a:prstGeom>
+          <a:solidFill>
+            <a:srgbClr val="111827">
+              <a:alpha val="80000"/>
+            </a:srgbClr>
+          </a:solidFill>
+          <a:ln w="12700">
+            <a:solidFill>
+              <a:srgbClr val="111827">
+                <a:alpha val="0"/>
+              </a:srgbClr>
+            </a:solidFill>
+            <a:prstDash val="solid"/>
+          </a:ln>
+        </p:spPr>
+      </p:sp>
+      <p:sp>
+        <p:nvSpPr>
+          <p:cNvPr id="17" name="Shape 15"/>
+          <p:cNvSpPr/>
+          <p:nvPr/>
+        </p:nvSpPr>
+        <p:spPr>
+          <a:xfrm>
+            <a:off x="914400" y="1865376"/>
+            <a:ext cx="73152" cy="1024128"/>
           </a:xfrm>
           <a:prstGeom prst="rect">
             <a:avLst/>
@@ -16976,14 +17443,14 @@
       </p:sp>
       <p:sp>
         <p:nvSpPr>
-          <p:cNvPr id="17" name="Shape 15"/>
-          <p:cNvSpPr/>
-          <p:nvPr/>
-        </p:nvSpPr>
-        <p:spPr>
-          <a:xfrm>
-            <a:off x="914400" y="2560320"/>
-            <a:ext cx="73152" cy="868680"/>
+          <p:cNvPr id="18" name="Shape 16"/>
+          <p:cNvSpPr/>
+          <p:nvPr/>
+        </p:nvSpPr>
+        <p:spPr>
+          <a:xfrm>
+            <a:off x="914400" y="3191256"/>
+            <a:ext cx="73152" cy="1024128"/>
           </a:xfrm>
           <a:prstGeom prst="rect">
             <a:avLst/>
@@ -17003,14 +17470,14 @@
       </p:sp>
       <p:sp>
         <p:nvSpPr>
-          <p:cNvPr id="18" name="Shape 16"/>
-          <p:cNvSpPr/>
-          <p:nvPr/>
-        </p:nvSpPr>
-        <p:spPr>
-          <a:xfrm>
-            <a:off x="914400" y="3703320"/>
-            <a:ext cx="73152" cy="868680"/>
+          <p:cNvPr id="19" name="Shape 17"/>
+          <p:cNvSpPr/>
+          <p:nvPr/>
+        </p:nvSpPr>
+        <p:spPr>
+          <a:xfrm>
+            <a:off x="914400" y="4507992"/>
+            <a:ext cx="73152" cy="1024128"/>
           </a:xfrm>
           <a:prstGeom prst="rect">
             <a:avLst/>
@@ -17030,7 +17497,7 @@
       </p:sp>
       <p:pic>
         <p:nvPicPr>
-          <p:cNvPr id="19" name="Image 0" descr="preencoded.png">    </p:cNvPr>
+          <p:cNvPr id="20" name="Image 0" descr="preencoded.png">    </p:cNvPr>
           <p:cNvPicPr>
             <a:picLocks noChangeAspect="1"/>
           </p:cNvPicPr>
@@ -17050,8 +17517,8 @@
         </p:blipFill>
         <p:spPr>
           <a:xfrm>
-            <a:off x="914400" y="1417320"/>
-            <a:ext cx="10241280" cy="868680"/>
+            <a:off x="914400" y="1865376"/>
+            <a:ext cx="10241280" cy="1024128"/>
           </a:xfrm>
           <a:prstGeom prst="rect">
             <a:avLst/>
@@ -17060,7 +17527,7 @@
       </p:pic>
       <p:pic>
         <p:nvPicPr>
-          <p:cNvPr id="20" name="Image 1" descr="preencoded.png">    </p:cNvPr>
+          <p:cNvPr id="21" name="Image 1" descr="preencoded.png">    </p:cNvPr>
           <p:cNvPicPr>
             <a:picLocks noChangeAspect="1"/>
           </p:cNvPicPr>
@@ -17080,8 +17547,8 @@
         </p:blipFill>
         <p:spPr>
           <a:xfrm>
-            <a:off x="914400" y="2560320"/>
-            <a:ext cx="10241280" cy="868680"/>
+            <a:off x="914400" y="3191256"/>
+            <a:ext cx="10241280" cy="1024128"/>
           </a:xfrm>
           <a:prstGeom prst="rect">
             <a:avLst/>
@@ -17090,7 +17557,7 @@
       </p:pic>
       <p:pic>
         <p:nvPicPr>
-          <p:cNvPr id="21" name="Image 2" descr="preencoded.png">    </p:cNvPr>
+          <p:cNvPr id="22" name="Image 2" descr="preencoded.png">    </p:cNvPr>
           <p:cNvPicPr>
             <a:picLocks noChangeAspect="1"/>
           </p:cNvPicPr>
@@ -17110,8 +17577,8 @@
         </p:blipFill>
         <p:spPr>
           <a:xfrm>
-            <a:off x="914400" y="3703320"/>
-            <a:ext cx="10241280" cy="868680"/>
+            <a:off x="914400" y="4507992"/>
+            <a:ext cx="10241280" cy="1024128"/>
           </a:xfrm>
           <a:prstGeom prst="rect">
             <a:avLst/>
@@ -17120,7 +17587,7 @@
       </p:pic>
       <p:sp>
         <p:nvSpPr>
-          <p:cNvPr id="22" name="Text 17"/>
+          <p:cNvPr id="23" name="Text 18"/>
           <p:cNvSpPr txBox="1"/>
           <p:nvPr/>
         </p:nvSpPr>
@@ -17162,18 +17629,18 @@
       </p:sp>
       <p:sp>
         <p:nvSpPr>
-          <p:cNvPr id="23" name="Shape 18"/>
-          <p:cNvSpPr/>
-          <p:nvPr/>
-        </p:nvSpPr>
-        <p:spPr>
-          <a:xfrm>
-            <a:off x="1097280" y="1623060"/>
-            <a:ext cx="457200" cy="457200"/>
+          <p:cNvPr id="24" name="Shape 19"/>
+          <p:cNvSpPr/>
+          <p:nvPr/>
+        </p:nvSpPr>
+        <p:spPr>
+          <a:xfrm>
+            <a:off x="1097280" y="2140428"/>
+            <a:ext cx="474025" cy="474025"/>
           </a:xfrm>
           <a:prstGeom prst="roundRect">
             <a:avLst>
-              <a:gd name="adj" fmla="val 8000"/>
+              <a:gd name="adj" fmla="val 7716"/>
             </a:avLst>
           </a:prstGeom>
           <a:solidFill>
@@ -17189,7 +17656,7 @@
       </p:sp>
       <p:pic>
         <p:nvPicPr>
-          <p:cNvPr id="24" name="Image 3" descr="flow icon from tabler-icons (MIT)">    </p:cNvPr>
+          <p:cNvPr id="25" name="Image 3" descr="flow icon from tabler-icons (MIT)">    </p:cNvPr>
           <p:cNvPicPr>
             <a:picLocks noChangeAspect="1"/>
           </p:cNvPicPr>
@@ -17209,8 +17676,8 @@
         </p:blipFill>
         <p:spPr>
           <a:xfrm>
-            <a:off x="1170432" y="1696212"/>
-            <a:ext cx="310896" cy="310896"/>
+            <a:off x="1170432" y="2213580"/>
+            <a:ext cx="327721" cy="327721"/>
           </a:xfrm>
           <a:prstGeom prst="rect">
             <a:avLst/>
@@ -17219,14 +17686,14 @@
       </p:pic>
       <p:sp>
         <p:nvSpPr>
-          <p:cNvPr id="25" name="Text 19"/>
+          <p:cNvPr id="26" name="Text 20"/>
           <p:cNvSpPr txBox="1"/>
           <p:nvPr/>
         </p:nvSpPr>
         <p:spPr>
           <a:xfrm>
-            <a:off x="1682496" y="1508760"/>
-            <a:ext cx="9272016" cy="685800"/>
+            <a:off x="1699321" y="1957548"/>
+            <a:ext cx="9255191" cy="839785"/>
           </a:xfrm>
           <a:prstGeom prst="rect">
             <a:avLst/>
@@ -17253,7 +17720,7 @@
                 <a:ea typeface="Pretendard" pitchFamily="34" charset="-122"/>
                 <a:cs typeface="Pretendard" pitchFamily="34" charset="-120"/>
               </a:rPr>
-              <a:t>Plain / clean</a:t>
+              <a:t>Clean / minimalism</a:t>
             </a:r>
             <a:pPr algn="l" indent="0" marL="0">
               <a:lnSpc>
@@ -17270,7 +17737,7 @@
                 <a:ea typeface="Pretendard" pitchFamily="34" charset="-122"/>
                 <a:cs typeface="Pretendard" pitchFamily="34" charset="-120"/>
               </a:rPr>
-              <a:t>  low-decoration baselines.</a:t>
+              <a:t>  restrained structural baselines.</a:t>
             </a:r>
             <a:endParaRPr lang="en-US" sz="2200" dirty="0"/>
           </a:p>
@@ -17278,18 +17745,18 @@
       </p:sp>
       <p:sp>
         <p:nvSpPr>
-          <p:cNvPr id="26" name="Shape 20"/>
-          <p:cNvSpPr/>
-          <p:nvPr/>
-        </p:nvSpPr>
-        <p:spPr>
-          <a:xfrm>
-            <a:off x="1097280" y="2766060"/>
-            <a:ext cx="457200" cy="457200"/>
+          <p:cNvPr id="27" name="Shape 21"/>
+          <p:cNvSpPr/>
+          <p:nvPr/>
+        </p:nvSpPr>
+        <p:spPr>
+          <a:xfrm>
+            <a:off x="1097280" y="3466308"/>
+            <a:ext cx="474025" cy="474025"/>
           </a:xfrm>
           <a:prstGeom prst="roundRect">
             <a:avLst>
-              <a:gd name="adj" fmla="val 8000"/>
+              <a:gd name="adj" fmla="val 7716"/>
             </a:avLst>
           </a:prstGeom>
           <a:solidFill>
@@ -17305,7 +17772,7 @@
       </p:sp>
       <p:pic>
         <p:nvPicPr>
-          <p:cNvPr id="27" name="Image 4" descr="verified icon from tabler-icons (MIT)">    </p:cNvPr>
+          <p:cNvPr id="28" name="Image 4" descr="verified icon from tabler-icons (MIT)">    </p:cNvPr>
           <p:cNvPicPr>
             <a:picLocks noChangeAspect="1"/>
           </p:cNvPicPr>
@@ -17325,8 +17792,8 @@
         </p:blipFill>
         <p:spPr>
           <a:xfrm>
-            <a:off x="1170432" y="2839212"/>
-            <a:ext cx="310896" cy="310896"/>
+            <a:off x="1170432" y="3539460"/>
+            <a:ext cx="327721" cy="327721"/>
           </a:xfrm>
           <a:prstGeom prst="rect">
             <a:avLst/>
@@ -17335,14 +17802,14 @@
       </p:pic>
       <p:sp>
         <p:nvSpPr>
-          <p:cNvPr id="28" name="Text 21"/>
+          <p:cNvPr id="29" name="Text 22"/>
           <p:cNvSpPr txBox="1"/>
           <p:nvPr/>
         </p:nvSpPr>
         <p:spPr>
           <a:xfrm>
-            <a:off x="1682496" y="2651760"/>
-            <a:ext cx="9272016" cy="685800"/>
+            <a:off x="1699321" y="3283428"/>
+            <a:ext cx="9255191" cy="839785"/>
           </a:xfrm>
           <a:prstGeom prst="rect">
             <a:avLst/>
@@ -17394,18 +17861,18 @@
       </p:sp>
       <p:sp>
         <p:nvSpPr>
-          <p:cNvPr id="29" name="Shape 22"/>
-          <p:cNvSpPr/>
-          <p:nvPr/>
-        </p:nvSpPr>
-        <p:spPr>
-          <a:xfrm>
-            <a:off x="1097280" y="3909060"/>
-            <a:ext cx="457200" cy="457200"/>
+          <p:cNvPr id="30" name="Shape 23"/>
+          <p:cNvSpPr/>
+          <p:nvPr/>
+        </p:nvSpPr>
+        <p:spPr>
+          <a:xfrm>
+            <a:off x="1097280" y="4783044"/>
+            <a:ext cx="474025" cy="474025"/>
           </a:xfrm>
           <a:prstGeom prst="roundRect">
             <a:avLst>
-              <a:gd name="adj" fmla="val 8000"/>
+              <a:gd name="adj" fmla="val 7716"/>
             </a:avLst>
           </a:prstGeom>
           <a:solidFill>
@@ -17421,7 +17888,7 @@
       </p:sp>
       <p:pic>
         <p:nvPicPr>
-          <p:cNvPr id="30" name="Image 5" descr="spark icon from tabler-icons (MIT)">    </p:cNvPr>
+          <p:cNvPr id="31" name="Image 5" descr="spark icon from tabler-icons (MIT)">    </p:cNvPr>
           <p:cNvPicPr>
             <a:picLocks noChangeAspect="1"/>
           </p:cNvPicPr>
@@ -17441,8 +17908,8 @@
         </p:blipFill>
         <p:spPr>
           <a:xfrm>
-            <a:off x="1170432" y="3982212"/>
-            <a:ext cx="310896" cy="310896"/>
+            <a:off x="1170432" y="4856196"/>
+            <a:ext cx="327721" cy="327721"/>
           </a:xfrm>
           <a:prstGeom prst="rect">
             <a:avLst/>
@@ -17451,14 +17918,14 @@
       </p:pic>
       <p:sp>
         <p:nvSpPr>
-          <p:cNvPr id="31" name="Text 23"/>
+          <p:cNvPr id="32" name="Text 24"/>
           <p:cNvSpPr txBox="1"/>
           <p:nvPr/>
         </p:nvSpPr>
         <p:spPr>
           <a:xfrm>
-            <a:off x="1682496" y="3794760"/>
-            <a:ext cx="9272016" cy="685800"/>
+            <a:off x="1699321" y="4600164"/>
+            <a:ext cx="9255191" cy="839785"/>
           </a:xfrm>
           <a:prstGeom prst="rect">
             <a:avLst/>

--- a/docs/theme-preview/pptx/grid.pptx
+++ b/docs/theme-preview/pptx/grid.pptx
@@ -10858,7 +10858,7 @@
       </p:sp>
       <p:pic>
         <p:nvPicPr>
-          <p:cNvPr id="26" name="Image 4" descr="flow icon from tabler-icons (MIT)">    </p:cNvPr>
+          <p:cNvPr id="26" name="Image 4" descr="article icon from tabler-icons (MIT)">    </p:cNvPr>
           <p:cNvPicPr>
             <a:picLocks noChangeAspect="1"/>
           </p:cNvPicPr>
@@ -10974,7 +10974,7 @@
       </p:sp>
       <p:pic>
         <p:nvPicPr>
-          <p:cNvPr id="29" name="Image 5" descr="verified icon from tabler-icons (MIT)">    </p:cNvPr>
+          <p:cNvPr id="29" name="Image 5" descr="article icon from tabler-icons (MIT)">    </p:cNvPr>
           <p:cNvPicPr>
             <a:picLocks noChangeAspect="1"/>
           </p:cNvPicPr>
@@ -11090,7 +11090,7 @@
       </p:sp>
       <p:pic>
         <p:nvPicPr>
-          <p:cNvPr id="32" name="Image 6" descr="spark icon from tabler-icons (MIT)">    </p:cNvPr>
+          <p:cNvPr id="32" name="Image 6" descr="article icon from tabler-icons (MIT)">    </p:cNvPr>
           <p:cNvPicPr>
             <a:picLocks noChangeAspect="1"/>
           </p:cNvPicPr>
@@ -11206,7 +11206,7 @@
       </p:sp>
       <p:pic>
         <p:nvPicPr>
-          <p:cNvPr id="35" name="Image 7" descr="chart icon from tabler-icons (MIT)">    </p:cNvPr>
+          <p:cNvPr id="35" name="Image 7" descr="table icon from tabler-icons (MIT)">    </p:cNvPr>
           <p:cNvPicPr>
             <a:picLocks noChangeAspect="1"/>
           </p:cNvPicPr>
@@ -11978,7 +11978,7 @@
       </p:sp>
       <p:pic>
         <p:nvPicPr>
-          <p:cNvPr id="26" name="Image 4" descr="flow icon from tabler-icons (MIT)">    </p:cNvPr>
+          <p:cNvPr id="26" name="Image 4" descr="verified icon from tabler-icons (MIT)">    </p:cNvPr>
           <p:cNvPicPr>
             <a:picLocks noChangeAspect="1"/>
           </p:cNvPicPr>
@@ -12094,7 +12094,7 @@
       </p:sp>
       <p:pic>
         <p:nvPicPr>
-          <p:cNvPr id="29" name="Image 5" descr="verified icon from tabler-icons (MIT)">    </p:cNvPr>
+          <p:cNvPr id="29" name="Image 5" descr="table icon from tabler-icons (MIT)">    </p:cNvPr>
           <p:cNvPicPr>
             <a:picLocks noChangeAspect="1"/>
           </p:cNvPicPr>
@@ -12210,7 +12210,7 @@
       </p:sp>
       <p:pic>
         <p:nvPicPr>
-          <p:cNvPr id="32" name="Image 6" descr="spark icon from tabler-icons (MIT)">    </p:cNvPr>
+          <p:cNvPr id="32" name="Image 6" descr="article icon from tabler-icons (MIT)">    </p:cNvPr>
           <p:cNvPicPr>
             <a:picLocks noChangeAspect="1"/>
           </p:cNvPicPr>
@@ -12326,7 +12326,7 @@
       </p:sp>
       <p:pic>
         <p:nvPicPr>
-          <p:cNvPr id="35" name="Image 7" descr="chart icon from tabler-icons (MIT)">    </p:cNvPr>
+          <p:cNvPr id="35" name="Image 7" descr="article icon from tabler-icons (MIT)">    </p:cNvPr>
           <p:cNvPicPr>
             <a:picLocks noChangeAspect="1"/>
           </p:cNvPicPr>
@@ -16080,7 +16080,7 @@
       </p:sp>
       <p:pic>
         <p:nvPicPr>
-          <p:cNvPr id="25" name="Image 3" descr="flow icon from tabler-icons (MIT)">    </p:cNvPr>
+          <p:cNvPr id="25" name="Image 3" descr="article icon from tabler-icons (MIT)">    </p:cNvPr>
           <p:cNvPicPr>
             <a:picLocks noChangeAspect="1"/>
           </p:cNvPicPr>
@@ -16196,7 +16196,7 @@
       </p:sp>
       <p:pic>
         <p:nvPicPr>
-          <p:cNvPr id="28" name="Image 4" descr="verified icon from tabler-icons (MIT)">    </p:cNvPr>
+          <p:cNvPr id="28" name="Image 4" descr="chart icon from tabler-icons (MIT)">    </p:cNvPr>
           <p:cNvPicPr>
             <a:picLocks noChangeAspect="1"/>
           </p:cNvPicPr>
@@ -16312,7 +16312,7 @@
       </p:sp>
       <p:pic>
         <p:nvPicPr>
-          <p:cNvPr id="31" name="Image 5" descr="spark icon from tabler-icons (MIT)">    </p:cNvPr>
+          <p:cNvPr id="31" name="Image 5" descr="article icon from tabler-icons (MIT)">    </p:cNvPr>
           <p:cNvPicPr>
             <a:picLocks noChangeAspect="1"/>
           </p:cNvPicPr>
@@ -17656,7 +17656,7 @@
       </p:sp>
       <p:pic>
         <p:nvPicPr>
-          <p:cNvPr id="25" name="Image 3" descr="flow icon from tabler-icons (MIT)">    </p:cNvPr>
+          <p:cNvPr id="25" name="Image 3" descr="article icon from tabler-icons (MIT)">    </p:cNvPr>
           <p:cNvPicPr>
             <a:picLocks noChangeAspect="1"/>
           </p:cNvPicPr>
@@ -17772,7 +17772,7 @@
       </p:sp>
       <p:pic>
         <p:nvPicPr>
-          <p:cNvPr id="28" name="Image 4" descr="verified icon from tabler-icons (MIT)">    </p:cNvPr>
+          <p:cNvPr id="28" name="Image 4" descr="article icon from tabler-icons (MIT)">    </p:cNvPr>
           <p:cNvPicPr>
             <a:picLocks noChangeAspect="1"/>
           </p:cNvPicPr>
@@ -17888,7 +17888,7 @@
       </p:sp>
       <p:pic>
         <p:nvPicPr>
-          <p:cNvPr id="31" name="Image 5" descr="spark icon from tabler-icons (MIT)">    </p:cNvPr>
+          <p:cNvPr id="31" name="Image 5" descr="article icon from tabler-icons (MIT)">    </p:cNvPr>
           <p:cNvPicPr>
             <a:picLocks noChangeAspect="1"/>
           </p:cNvPicPr>
@@ -19260,7 +19260,7 @@
       </p:sp>
       <p:pic>
         <p:nvPicPr>
-          <p:cNvPr id="26" name="Image 4" descr="flow icon from tabler-icons (MIT)">    </p:cNvPr>
+          <p:cNvPr id="26" name="Image 4" descr="table icon from tabler-icons (MIT)">    </p:cNvPr>
           <p:cNvPicPr>
             <a:picLocks noChangeAspect="1"/>
           </p:cNvPicPr>
@@ -19376,7 +19376,7 @@
       </p:sp>
       <p:pic>
         <p:nvPicPr>
-          <p:cNvPr id="29" name="Image 5" descr="verified icon from tabler-icons (MIT)">    </p:cNvPr>
+          <p:cNvPr id="29" name="Image 5" descr="article icon from tabler-icons (MIT)">    </p:cNvPr>
           <p:cNvPicPr>
             <a:picLocks noChangeAspect="1"/>
           </p:cNvPicPr>
@@ -19492,7 +19492,7 @@
       </p:sp>
       <p:pic>
         <p:nvPicPr>
-          <p:cNvPr id="32" name="Image 6" descr="spark icon from tabler-icons (MIT)">    </p:cNvPr>
+          <p:cNvPr id="32" name="Image 6" descr="article icon from tabler-icons (MIT)">    </p:cNvPr>
           <p:cNvPicPr>
             <a:picLocks noChangeAspect="1"/>
           </p:cNvPicPr>
@@ -19608,7 +19608,7 @@
       </p:sp>
       <p:pic>
         <p:nvPicPr>
-          <p:cNvPr id="35" name="Image 7" descr="chart icon from tabler-icons (MIT)">    </p:cNvPr>
+          <p:cNvPr id="35" name="Image 7" descr="table icon from tabler-icons (MIT)">    </p:cNvPr>
           <p:cNvPicPr>
             <a:picLocks noChangeAspect="1"/>
           </p:cNvPicPr>

--- a/docs/theme-preview/pptx/grid.pptx
+++ b/docs/theme-preview/pptx/grid.pptx
@@ -14218,7 +14218,7 @@
                 <a:ea typeface="Pretendard" pitchFamily="34" charset="-122"/>
                 <a:cs typeface="Pretendard" pitchFamily="34" charset="-120"/>
               </a:rPr>
-              <a:t>목차</a:t>
+              <a:t>Agenda</a:t>
             </a:r>
             <a:endParaRPr lang="en-US" sz="3800" dirty="0"/>
           </a:p>

--- a/docs/theme-preview/pptx/grid.pptx
+++ b/docs/theme-preview/pptx/grid.pptx
@@ -3658,36 +3658,39 @@
           </a:ln>
         </p:spPr>
       </p:sp>
-      <p:sp>
-        <p:nvSpPr>
-          <p:cNvPr id="16" name="Shape 14"/>
-          <p:cNvSpPr/>
-          <p:nvPr/>
-        </p:nvSpPr>
-        <p:spPr>
-          <a:xfrm>
-            <a:off x="914400" y="1463040"/>
-            <a:ext cx="10241280" cy="73152"/>
-          </a:xfrm>
-          <a:prstGeom prst="rect">
-            <a:avLst/>
-          </a:prstGeom>
-          <a:solidFill>
-            <a:srgbClr val="DC2626"/>
-          </a:solidFill>
-          <a:ln w="12700">
-            <a:solidFill>
-              <a:srgbClr val="DC2626">
-                <a:alpha val="0"/>
-              </a:srgbClr>
-            </a:solidFill>
-            <a:prstDash val="solid"/>
-          </a:ln>
-        </p:spPr>
-      </p:sp>
-      <p:sp>
-        <p:nvSpPr>
-          <p:cNvPr id="17" name="Text 15"/>
+      <p:pic>
+        <p:nvPicPr>
+          <p:cNvPr id="16" name="Image 0" descr="preencoded.png">    </p:cNvPr>
+          <p:cNvPicPr>
+            <a:picLocks noChangeAspect="1"/>
+          </p:cNvPicPr>
+          <p:nvPr/>
+        </p:nvPicPr>
+        <p:blipFill>
+          <a:blip r:embed="rId1">
+            <a:extLst>
+              <a:ext uri="{96DAC541-7B7A-43D3-8B79-37D633B846F1}">
+                <asvg:svgBlip xmlns:asvg="http://schemas.microsoft.com/office/drawing/2016/SVG/main" r:embed="rId2"/>
+              </a:ext>
+            </a:extLst>
+          </a:blip>
+          <a:stretch>
+            <a:fillRect/>
+          </a:stretch>
+        </p:blipFill>
+        <p:spPr>
+          <a:xfrm>
+            <a:off x="914400" y="1417320"/>
+            <a:ext cx="10241280" cy="4526280"/>
+          </a:xfrm>
+          <a:prstGeom prst="rect">
+            <a:avLst/>
+          </a:prstGeom>
+        </p:spPr>
+      </p:pic>
+      <p:sp>
+        <p:nvSpPr>
+          <p:cNvPr id="17" name="Text 14"/>
           <p:cNvSpPr txBox="1"/>
           <p:nvPr/>
         </p:nvSpPr>
@@ -3742,8 +3745,8 @@
           </p:nvPr>
         </p:nvGraphicFramePr>
         <p:xfrm>
-          <a:off x="914400" y="1463040"/>
-          <a:ext cx="10241280" cy="4480560"/>
+          <a:off x="914400" y="1417320"/>
+          <a:ext cx="10241280" cy="4526280"/>
         </p:xfrm>
         <a:graphic>
           <a:graphicData uri="http://schemas.openxmlformats.org/drawingml/2006/table">
@@ -3754,7 +3757,7 @@
                 <a:gridCol w="3413760"/>
                 <a:gridCol w="3413760"/>
               </a:tblGrid>
-              <a:tr h="896112">
+              <a:tr h="905256">
                 <a:tc>
                   <a:txBody>
                     <a:bodyPr/>
@@ -3764,7 +3767,7 @@
                         <a:buNone/>
                       </a:pPr>
                       <a:r>
-                        <a:rPr lang="en-US" sz="2200" b="1" dirty="0">
+                        <a:rPr lang="en-US" sz="1800" b="1" dirty="0">
                           <a:solidFill>
                             <a:srgbClr val="FFFFFF"/>
                           </a:solidFill>
@@ -3774,7 +3777,7 @@
                         </a:rPr>
                         <a:t>Object</a:t>
                       </a:r>
-                      <a:endParaRPr lang="en-US" sz="2200" dirty="0">
+                      <a:endParaRPr lang="en-US" sz="1800" dirty="0">
                         <a:latin typeface="Pretendard" charset="0"/>
                         <a:ea typeface="Pretendard" charset="0"/>
                         <a:cs typeface="Pretendard" charset="0"/>
@@ -3832,7 +3835,7 @@
                         <a:buNone/>
                       </a:pPr>
                       <a:r>
-                        <a:rPr lang="en-US" sz="2200" b="1" dirty="0">
+                        <a:rPr lang="en-US" sz="1800" b="1" dirty="0">
                           <a:solidFill>
                             <a:srgbClr val="FFFFFF"/>
                           </a:solidFill>
@@ -3842,7 +3845,7 @@
                         </a:rPr>
                         <a:t>Renderer expectation</a:t>
                       </a:r>
-                      <a:endParaRPr lang="en-US" sz="2200" dirty="0">
+                      <a:endParaRPr lang="en-US" sz="1800" dirty="0">
                         <a:latin typeface="Pretendard" charset="0"/>
                         <a:ea typeface="Pretendard" charset="0"/>
                         <a:cs typeface="Pretendard" charset="0"/>
@@ -3900,7 +3903,7 @@
                         <a:buNone/>
                       </a:pPr>
                       <a:r>
-                        <a:rPr lang="en-US" sz="2200" b="1" dirty="0">
+                        <a:rPr lang="en-US" sz="1800" b="1" dirty="0">
                           <a:solidFill>
                             <a:srgbClr val="FFFFFF"/>
                           </a:solidFill>
@@ -3910,7 +3913,7 @@
                         </a:rPr>
                         <a:t>QA signal</a:t>
                       </a:r>
-                      <a:endParaRPr lang="en-US" sz="2200" dirty="0">
+                      <a:endParaRPr lang="en-US" sz="1800" dirty="0">
                         <a:latin typeface="Pretendard" charset="0"/>
                         <a:ea typeface="Pretendard" charset="0"/>
                         <a:cs typeface="Pretendard" charset="0"/>
@@ -3960,7 +3963,7 @@
                   </a:tcPr>
                 </a:tc>
               </a:tr>
-              <a:tr h="896112">
+              <a:tr h="905256">
                 <a:tc>
                   <a:txBody>
                     <a:bodyPr/>
@@ -3970,7 +3973,7 @@
                         <a:buNone/>
                       </a:pPr>
                       <a:r>
-                        <a:rPr lang="en-US" sz="2200" b="1" dirty="0">
+                        <a:rPr lang="en-US" sz="1800" b="1" dirty="0">
                           <a:solidFill>
                             <a:srgbClr val="111827"/>
                           </a:solidFill>
@@ -3980,7 +3983,7 @@
                         </a:rPr>
                         <a:t>Text box</a:t>
                       </a:r>
-                      <a:endParaRPr lang="en-US" sz="2200" dirty="0">
+                      <a:endParaRPr lang="en-US" sz="1800" dirty="0">
                         <a:latin typeface="Pretendard" charset="0"/>
                         <a:ea typeface="Pretendard" charset="0"/>
                         <a:cs typeface="Pretendard" charset="0"/>
@@ -4035,7 +4038,7 @@
                         <a:buNone/>
                       </a:pPr>
                       <a:r>
-                        <a:rPr lang="en-US" sz="2200" dirty="0">
+                        <a:rPr lang="en-US" sz="1800" dirty="0">
                           <a:solidFill>
                             <a:srgbClr val="111827"/>
                           </a:solidFill>
@@ -4045,7 +4048,7 @@
                         </a:rPr>
                         <a:t>editable, middle aligned</a:t>
                       </a:r>
-                      <a:endParaRPr lang="en-US" sz="2200" dirty="0">
+                      <a:endParaRPr lang="en-US" sz="1800" dirty="0">
                         <a:latin typeface="Pretendard" charset="0"/>
                         <a:ea typeface="Pretendard" charset="0"/>
                         <a:cs typeface="Pretendard" charset="0"/>
@@ -4100,7 +4103,7 @@
                         <a:buNone/>
                       </a:pPr>
                       <a:r>
-                        <a:rPr lang="en-US" sz="2200" dirty="0">
+                        <a:rPr lang="en-US" sz="1800" dirty="0">
                           <a:solidFill>
                             <a:srgbClr val="111827"/>
                           </a:solidFill>
@@ -4110,7 +4113,7 @@
                         </a:rPr>
                         <a:t>readable minimum size</a:t>
                       </a:r>
-                      <a:endParaRPr lang="en-US" sz="2200" dirty="0">
+                      <a:endParaRPr lang="en-US" sz="1800" dirty="0">
                         <a:latin typeface="Pretendard" charset="0"/>
                         <a:ea typeface="Pretendard" charset="0"/>
                         <a:cs typeface="Pretendard" charset="0"/>
@@ -4157,7 +4160,7 @@
                   </a:tcPr>
                 </a:tc>
               </a:tr>
-              <a:tr h="896112">
+              <a:tr h="905256">
                 <a:tc>
                   <a:txBody>
                     <a:bodyPr/>
@@ -4167,7 +4170,7 @@
                         <a:buNone/>
                       </a:pPr>
                       <a:r>
-                        <a:rPr lang="en-US" sz="2200" b="1" dirty="0">
+                        <a:rPr lang="en-US" sz="1800" b="1" dirty="0">
                           <a:solidFill>
                             <a:srgbClr val="111827"/>
                           </a:solidFill>
@@ -4177,7 +4180,7 @@
                         </a:rPr>
                         <a:t>Table</a:t>
                       </a:r>
-                      <a:endParaRPr lang="en-US" sz="2200" dirty="0">
+                      <a:endParaRPr lang="en-US" sz="1800" dirty="0">
                         <a:latin typeface="Pretendard" charset="0"/>
                         <a:ea typeface="Pretendard" charset="0"/>
                         <a:cs typeface="Pretendard" charset="0"/>
@@ -4237,7 +4240,7 @@
                         <a:buNone/>
                       </a:pPr>
                       <a:r>
-                        <a:rPr lang="en-US" sz="2200" dirty="0">
+                        <a:rPr lang="en-US" sz="1800" dirty="0">
                           <a:solidFill>
                             <a:srgbClr val="111827"/>
                           </a:solidFill>
@@ -4247,7 +4250,7 @@
                         </a:rPr>
                         <a:t>native table object</a:t>
                       </a:r>
-                      <a:endParaRPr lang="en-US" sz="2200" dirty="0">
+                      <a:endParaRPr lang="en-US" sz="1800" dirty="0">
                         <a:latin typeface="Pretendard" charset="0"/>
                         <a:ea typeface="Pretendard" charset="0"/>
                         <a:cs typeface="Pretendard" charset="0"/>
@@ -4307,7 +4310,7 @@
                         <a:buNone/>
                       </a:pPr>
                       <a:r>
-                        <a:rPr lang="en-US" sz="2200" dirty="0">
+                        <a:rPr lang="en-US" sz="1800" dirty="0">
                           <a:solidFill>
                             <a:srgbClr val="111827"/>
                           </a:solidFill>
@@ -4317,7 +4320,7 @@
                         </a:rPr>
                         <a:t>header fill and cell padding</a:t>
                       </a:r>
-                      <a:endParaRPr lang="en-US" sz="2200" dirty="0">
+                      <a:endParaRPr lang="en-US" sz="1800" dirty="0">
                         <a:latin typeface="Pretendard" charset="0"/>
                         <a:ea typeface="Pretendard" charset="0"/>
                         <a:cs typeface="Pretendard" charset="0"/>
@@ -4369,7 +4372,7 @@
                   </a:tcPr>
                 </a:tc>
               </a:tr>
-              <a:tr h="896112">
+              <a:tr h="905256">
                 <a:tc>
                   <a:txBody>
                     <a:bodyPr/>
@@ -4379,7 +4382,7 @@
                         <a:buNone/>
                       </a:pPr>
                       <a:r>
-                        <a:rPr lang="en-US" sz="2200" b="1" dirty="0">
+                        <a:rPr lang="en-US" sz="1800" b="1" dirty="0">
                           <a:solidFill>
                             <a:srgbClr val="111827"/>
                           </a:solidFill>
@@ -4389,7 +4392,7 @@
                         </a:rPr>
                         <a:t>Diagram</a:t>
                       </a:r>
-                      <a:endParaRPr lang="en-US" sz="2200" dirty="0">
+                      <a:endParaRPr lang="en-US" sz="1800" dirty="0">
                         <a:latin typeface="Pretendard" charset="0"/>
                         <a:ea typeface="Pretendard" charset="0"/>
                         <a:cs typeface="Pretendard" charset="0"/>
@@ -4444,7 +4447,7 @@
                         <a:buNone/>
                       </a:pPr>
                       <a:r>
-                        <a:rPr lang="en-US" sz="2200" dirty="0">
+                        <a:rPr lang="en-US" sz="1800" dirty="0">
                           <a:solidFill>
                             <a:srgbClr val="111827"/>
                           </a:solidFill>
@@ -4454,7 +4457,7 @@
                         </a:rPr>
                         <a:t>nodes and connectors</a:t>
                       </a:r>
-                      <a:endParaRPr lang="en-US" sz="2200" dirty="0">
+                      <a:endParaRPr lang="en-US" sz="1800" dirty="0">
                         <a:latin typeface="Pretendard" charset="0"/>
                         <a:ea typeface="Pretendard" charset="0"/>
                         <a:cs typeface="Pretendard" charset="0"/>
@@ -4509,7 +4512,7 @@
                         <a:buNone/>
                       </a:pPr>
                       <a:r>
-                        <a:rPr lang="en-US" sz="2200" dirty="0">
+                        <a:rPr lang="en-US" sz="1800" dirty="0">
                           <a:solidFill>
                             <a:srgbClr val="111827"/>
                           </a:solidFill>
@@ -4519,7 +4522,7 @@
                         </a:rPr>
                         <a:t>no clipped labels</a:t>
                       </a:r>
-                      <a:endParaRPr lang="en-US" sz="2200" dirty="0">
+                      <a:endParaRPr lang="en-US" sz="1800" dirty="0">
                         <a:latin typeface="Pretendard" charset="0"/>
                         <a:ea typeface="Pretendard" charset="0"/>
                         <a:cs typeface="Pretendard" charset="0"/>
@@ -4566,7 +4569,7 @@
                   </a:tcPr>
                 </a:tc>
               </a:tr>
-              <a:tr h="896112">
+              <a:tr h="905256">
                 <a:tc>
                   <a:txBody>
                     <a:bodyPr/>
@@ -4576,7 +4579,7 @@
                         <a:buNone/>
                       </a:pPr>
                       <a:r>
-                        <a:rPr lang="en-US" sz="2200" b="1" dirty="0">
+                        <a:rPr lang="en-US" sz="1800" b="1" dirty="0">
                           <a:solidFill>
                             <a:srgbClr val="111827"/>
                           </a:solidFill>
@@ -4586,7 +4589,7 @@
                         </a:rPr>
                         <a:t>Chart</a:t>
                       </a:r>
-                      <a:endParaRPr lang="en-US" sz="2200" dirty="0">
+                      <a:endParaRPr lang="en-US" sz="1800" dirty="0">
                         <a:latin typeface="Pretendard" charset="0"/>
                         <a:ea typeface="Pretendard" charset="0"/>
                         <a:cs typeface="Pretendard" charset="0"/>
@@ -4646,7 +4649,7 @@
                         <a:buNone/>
                       </a:pPr>
                       <a:r>
-                        <a:rPr lang="en-US" sz="2200" dirty="0">
+                        <a:rPr lang="en-US" sz="1800" dirty="0">
                           <a:solidFill>
                             <a:srgbClr val="111827"/>
                           </a:solidFill>
@@ -4656,7 +4659,7 @@
                         </a:rPr>
                         <a:t>theme-colored data object</a:t>
                       </a:r>
-                      <a:endParaRPr lang="en-US" sz="2200" dirty="0">
+                      <a:endParaRPr lang="en-US" sz="1800" dirty="0">
                         <a:latin typeface="Pretendard" charset="0"/>
                         <a:ea typeface="Pretendard" charset="0"/>
                         <a:cs typeface="Pretendard" charset="0"/>
@@ -4716,7 +4719,7 @@
                         <a:buNone/>
                       </a:pPr>
                       <a:r>
-                        <a:rPr lang="en-US" sz="2200" dirty="0">
+                        <a:rPr lang="en-US" sz="1800" dirty="0">
                           <a:solidFill>
                             <a:srgbClr val="111827"/>
                           </a:solidFill>
@@ -4726,7 +4729,7 @@
                         </a:rPr>
                         <a:t>contrast and value clarity</a:t>
                       </a:r>
-                      <a:endParaRPr lang="en-US" sz="2200" dirty="0">
+                      <a:endParaRPr lang="en-US" sz="1800" dirty="0">
                         <a:latin typeface="Pretendard" charset="0"/>
                         <a:ea typeface="Pretendard" charset="0"/>
                         <a:cs typeface="Pretendard" charset="0"/>
@@ -5808,36 +5811,39 @@
           </a:ln>
         </p:spPr>
       </p:sp>
-      <p:sp>
-        <p:nvSpPr>
-          <p:cNvPr id="16" name="Shape 14"/>
-          <p:cNvSpPr/>
-          <p:nvPr/>
-        </p:nvSpPr>
-        <p:spPr>
-          <a:xfrm>
-            <a:off x="914400" y="1463040"/>
-            <a:ext cx="10241280" cy="73152"/>
-          </a:xfrm>
-          <a:prstGeom prst="rect">
-            <a:avLst/>
-          </a:prstGeom>
-          <a:solidFill>
-            <a:srgbClr val="DC2626"/>
-          </a:solidFill>
-          <a:ln w="12700">
-            <a:solidFill>
-              <a:srgbClr val="DC2626">
-                <a:alpha val="0"/>
-              </a:srgbClr>
-            </a:solidFill>
-            <a:prstDash val="solid"/>
-          </a:ln>
-        </p:spPr>
-      </p:sp>
-      <p:sp>
-        <p:nvSpPr>
-          <p:cNvPr id="17" name="Text 15"/>
+      <p:pic>
+        <p:nvPicPr>
+          <p:cNvPr id="16" name="Image 0" descr="preencoded.png">    </p:cNvPr>
+          <p:cNvPicPr>
+            <a:picLocks noChangeAspect="1"/>
+          </p:cNvPicPr>
+          <p:nvPr/>
+        </p:nvPicPr>
+        <p:blipFill>
+          <a:blip r:embed="rId1">
+            <a:extLst>
+              <a:ext uri="{96DAC541-7B7A-43D3-8B79-37D633B846F1}">
+                <asvg:svgBlip xmlns:asvg="http://schemas.microsoft.com/office/drawing/2016/SVG/main" r:embed="rId2"/>
+              </a:ext>
+            </a:extLst>
+          </a:blip>
+          <a:stretch>
+            <a:fillRect/>
+          </a:stretch>
+        </p:blipFill>
+        <p:spPr>
+          <a:xfrm>
+            <a:off x="914400" y="1417320"/>
+            <a:ext cx="10241280" cy="4526280"/>
+          </a:xfrm>
+          <a:prstGeom prst="rect">
+            <a:avLst/>
+          </a:prstGeom>
+        </p:spPr>
+      </p:pic>
+      <p:sp>
+        <p:nvSpPr>
+          <p:cNvPr id="17" name="Text 14"/>
           <p:cNvSpPr txBox="1"/>
           <p:nvPr/>
         </p:nvSpPr>
@@ -5892,8 +5898,8 @@
           </p:nvPr>
         </p:nvGraphicFramePr>
         <p:xfrm>
-          <a:off x="914400" y="1463040"/>
-          <a:ext cx="10241280" cy="4480560"/>
+          <a:off x="914400" y="1417320"/>
+          <a:ext cx="10241280" cy="4526280"/>
         </p:xfrm>
         <a:graphic>
           <a:graphicData uri="http://schemas.openxmlformats.org/drawingml/2006/table">
@@ -5904,7 +5910,7 @@
                 <a:gridCol w="3413760"/>
                 <a:gridCol w="3413760"/>
               </a:tblGrid>
-              <a:tr h="1120140">
+              <a:tr h="1131570">
                 <a:tc>
                   <a:txBody>
                     <a:bodyPr/>
@@ -5914,7 +5920,7 @@
                         <a:buNone/>
                       </a:pPr>
                       <a:r>
-                        <a:rPr lang="en-US" sz="2200" b="1" dirty="0">
+                        <a:rPr lang="en-US" sz="1800" b="1" dirty="0">
                           <a:solidFill>
                             <a:srgbClr val="FFFFFF"/>
                           </a:solidFill>
@@ -5924,7 +5930,7 @@
                         </a:rPr>
                         <a:t>Stage</a:t>
                       </a:r>
-                      <a:endParaRPr lang="en-US" sz="2200" dirty="0">
+                      <a:endParaRPr lang="en-US" sz="1800" dirty="0">
                         <a:latin typeface="Pretendard" charset="0"/>
                         <a:ea typeface="Pretendard" charset="0"/>
                         <a:cs typeface="Pretendard" charset="0"/>
@@ -5982,7 +5988,7 @@
                         <a:buNone/>
                       </a:pPr>
                       <a:r>
-                        <a:rPr lang="en-US" sz="2200" b="1" dirty="0">
+                        <a:rPr lang="en-US" sz="1800" b="1" dirty="0">
                           <a:solidFill>
                             <a:srgbClr val="FFFFFF"/>
                           </a:solidFill>
@@ -5992,7 +5998,7 @@
                         </a:rPr>
                         <a:t>Coverage</a:t>
                       </a:r>
-                      <a:endParaRPr lang="en-US" sz="2200" dirty="0">
+                      <a:endParaRPr lang="en-US" sz="1800" dirty="0">
                         <a:latin typeface="Pretendard" charset="0"/>
                         <a:ea typeface="Pretendard" charset="0"/>
                         <a:cs typeface="Pretendard" charset="0"/>
@@ -6050,7 +6056,7 @@
                         <a:buNone/>
                       </a:pPr>
                       <a:r>
-                        <a:rPr lang="en-US" sz="2200" b="1" dirty="0">
+                        <a:rPr lang="en-US" sz="1800" b="1" dirty="0">
                           <a:solidFill>
                             <a:srgbClr val="FFFFFF"/>
                           </a:solidFill>
@@ -6060,7 +6066,7 @@
                         </a:rPr>
                         <a:t>Defects</a:t>
                       </a:r>
-                      <a:endParaRPr lang="en-US" sz="2200" dirty="0">
+                      <a:endParaRPr lang="en-US" sz="1800" dirty="0">
                         <a:latin typeface="Pretendard" charset="0"/>
                         <a:ea typeface="Pretendard" charset="0"/>
                         <a:cs typeface="Pretendard" charset="0"/>
@@ -6110,7 +6116,7 @@
                   </a:tcPr>
                 </a:tc>
               </a:tr>
-              <a:tr h="1120140">
+              <a:tr h="1131570">
                 <a:tc>
                   <a:txBody>
                     <a:bodyPr/>
@@ -6120,7 +6126,7 @@
                         <a:buNone/>
                       </a:pPr>
                       <a:r>
-                        <a:rPr lang="en-US" sz="2200" b="1" dirty="0">
+                        <a:rPr lang="en-US" sz="1800" b="1" dirty="0">
                           <a:solidFill>
                             <a:srgbClr val="111827"/>
                           </a:solidFill>
@@ -6130,7 +6136,7 @@
                         </a:rPr>
                         <a:t>Parser</a:t>
                       </a:r>
-                      <a:endParaRPr lang="en-US" sz="2200" dirty="0">
+                      <a:endParaRPr lang="en-US" sz="1800" dirty="0">
                         <a:latin typeface="Pretendard" charset="0"/>
                         <a:ea typeface="Pretendard" charset="0"/>
                         <a:cs typeface="Pretendard" charset="0"/>
@@ -6185,7 +6191,7 @@
                         <a:buNone/>
                       </a:pPr>
                       <a:r>
-                        <a:rPr lang="en-US" sz="2200" dirty="0">
+                        <a:rPr lang="en-US" sz="1800" dirty="0">
                           <a:solidFill>
                             <a:srgbClr val="111827"/>
                           </a:solidFill>
@@ -6195,7 +6201,7 @@
                         </a:rPr>
                         <a:t>92</a:t>
                       </a:r>
-                      <a:endParaRPr lang="en-US" sz="2200" dirty="0">
+                      <a:endParaRPr lang="en-US" sz="1800" dirty="0">
                         <a:latin typeface="Pretendard" charset="0"/>
                         <a:ea typeface="Pretendard" charset="0"/>
                         <a:cs typeface="Pretendard" charset="0"/>
@@ -6250,7 +6256,7 @@
                         <a:buNone/>
                       </a:pPr>
                       <a:r>
-                        <a:rPr lang="en-US" sz="2200" dirty="0">
+                        <a:rPr lang="en-US" sz="1800" dirty="0">
                           <a:solidFill>
                             <a:srgbClr val="111827"/>
                           </a:solidFill>
@@ -6260,7 +6266,7 @@
                         </a:rPr>
                         <a:t>3</a:t>
                       </a:r>
-                      <a:endParaRPr lang="en-US" sz="2200" dirty="0">
+                      <a:endParaRPr lang="en-US" sz="1800" dirty="0">
                         <a:latin typeface="Pretendard" charset="0"/>
                         <a:ea typeface="Pretendard" charset="0"/>
                         <a:cs typeface="Pretendard" charset="0"/>
@@ -6307,7 +6313,7 @@
                   </a:tcPr>
                 </a:tc>
               </a:tr>
-              <a:tr h="1120140">
+              <a:tr h="1131570">
                 <a:tc>
                   <a:txBody>
                     <a:bodyPr/>
@@ -6317,7 +6323,7 @@
                         <a:buNone/>
                       </a:pPr>
                       <a:r>
-                        <a:rPr lang="en-US" sz="2200" b="1" dirty="0">
+                        <a:rPr lang="en-US" sz="1800" b="1" dirty="0">
                           <a:solidFill>
                             <a:srgbClr val="111827"/>
                           </a:solidFill>
@@ -6327,7 +6333,7 @@
                         </a:rPr>
                         <a:t>Layout</a:t>
                       </a:r>
-                      <a:endParaRPr lang="en-US" sz="2200" dirty="0">
+                      <a:endParaRPr lang="en-US" sz="1800" dirty="0">
                         <a:latin typeface="Pretendard" charset="0"/>
                         <a:ea typeface="Pretendard" charset="0"/>
                         <a:cs typeface="Pretendard" charset="0"/>
@@ -6387,7 +6393,7 @@
                         <a:buNone/>
                       </a:pPr>
                       <a:r>
-                        <a:rPr lang="en-US" sz="2200" dirty="0">
+                        <a:rPr lang="en-US" sz="1800" dirty="0">
                           <a:solidFill>
                             <a:srgbClr val="111827"/>
                           </a:solidFill>
@@ -6397,7 +6403,7 @@
                         </a:rPr>
                         <a:t>88</a:t>
                       </a:r>
-                      <a:endParaRPr lang="en-US" sz="2200" dirty="0">
+                      <a:endParaRPr lang="en-US" sz="1800" dirty="0">
                         <a:latin typeface="Pretendard" charset="0"/>
                         <a:ea typeface="Pretendard" charset="0"/>
                         <a:cs typeface="Pretendard" charset="0"/>
@@ -6457,7 +6463,7 @@
                         <a:buNone/>
                       </a:pPr>
                       <a:r>
-                        <a:rPr lang="en-US" sz="2200" dirty="0">
+                        <a:rPr lang="en-US" sz="1800" dirty="0">
                           <a:solidFill>
                             <a:srgbClr val="111827"/>
                           </a:solidFill>
@@ -6467,7 +6473,7 @@
                         </a:rPr>
                         <a:t>5</a:t>
                       </a:r>
-                      <a:endParaRPr lang="en-US" sz="2200" dirty="0">
+                      <a:endParaRPr lang="en-US" sz="1800" dirty="0">
                         <a:latin typeface="Pretendard" charset="0"/>
                         <a:ea typeface="Pretendard" charset="0"/>
                         <a:cs typeface="Pretendard" charset="0"/>
@@ -6519,7 +6525,7 @@
                   </a:tcPr>
                 </a:tc>
               </a:tr>
-              <a:tr h="1120140">
+              <a:tr h="1131570">
                 <a:tc>
                   <a:txBody>
                     <a:bodyPr/>
@@ -6529,7 +6535,7 @@
                         <a:buNone/>
                       </a:pPr>
                       <a:r>
-                        <a:rPr lang="en-US" sz="2200" b="1" dirty="0">
+                        <a:rPr lang="en-US" sz="1800" b="1" dirty="0">
                           <a:solidFill>
                             <a:srgbClr val="111827"/>
                           </a:solidFill>
@@ -6539,7 +6545,7 @@
                         </a:rPr>
                         <a:t>PPTX</a:t>
                       </a:r>
-                      <a:endParaRPr lang="en-US" sz="2200" dirty="0">
+                      <a:endParaRPr lang="en-US" sz="1800" dirty="0">
                         <a:latin typeface="Pretendard" charset="0"/>
                         <a:ea typeface="Pretendard" charset="0"/>
                         <a:cs typeface="Pretendard" charset="0"/>
@@ -6594,7 +6600,7 @@
                         <a:buNone/>
                       </a:pPr>
                       <a:r>
-                        <a:rPr lang="en-US" sz="2200" dirty="0">
+                        <a:rPr lang="en-US" sz="1800" dirty="0">
                           <a:solidFill>
                             <a:srgbClr val="111827"/>
                           </a:solidFill>
@@ -6604,7 +6610,7 @@
                         </a:rPr>
                         <a:t>95</a:t>
                       </a:r>
-                      <a:endParaRPr lang="en-US" sz="2200" dirty="0">
+                      <a:endParaRPr lang="en-US" sz="1800" dirty="0">
                         <a:latin typeface="Pretendard" charset="0"/>
                         <a:ea typeface="Pretendard" charset="0"/>
                         <a:cs typeface="Pretendard" charset="0"/>
@@ -6659,7 +6665,7 @@
                         <a:buNone/>
                       </a:pPr>
                       <a:r>
-                        <a:rPr lang="en-US" sz="2200" dirty="0">
+                        <a:rPr lang="en-US" sz="1800" dirty="0">
                           <a:solidFill>
                             <a:srgbClr val="111827"/>
                           </a:solidFill>
@@ -6669,7 +6675,7 @@
                         </a:rPr>
                         <a:t>2</a:t>
                       </a:r>
-                      <a:endParaRPr lang="en-US" sz="2200" dirty="0">
+                      <a:endParaRPr lang="en-US" sz="1800" dirty="0">
                         <a:latin typeface="Pretendard" charset="0"/>
                         <a:ea typeface="Pretendard" charset="0"/>
                         <a:cs typeface="Pretendard" charset="0"/>
